--- a/Materjalid/Day16 Lõputööd/16-paev-andmetarkus-esitlus.pptx
+++ b/Materjalid/Day16 Lõputööd/16-paev-andmetarkus-esitlus.pptx
@@ -5,40 +5,31 @@
     <p:sldMasterId id="2147483648" r:id="rId4"/>
   </p:sldMasterIdLst>
   <p:notesMasterIdLst>
-    <p:notesMasterId r:id="rId9"/>
+    <p:notesMasterId r:id="rId7"/>
   </p:notesMasterIdLst>
   <p:handoutMasterIdLst>
-    <p:handoutMasterId r:id="rId10"/>
+    <p:handoutMasterId r:id="rId8"/>
   </p:handoutMasterIdLst>
   <p:sldIdLst>
     <p:sldId id="417" r:id="rId5"/>
     <p:sldId id="493" r:id="rId6"/>
-    <p:sldId id="574" r:id="rId7"/>
-    <p:sldId id="538" r:id="rId8"/>
   </p:sldIdLst>
   <p:sldSz cx="12192000" cy="6858000"/>
   <p:notesSz cx="6858000" cy="9144000"/>
   <p:embeddedFontLst>
     <p:embeddedFont>
       <p:font typeface="Inter" panose="020B0604020202020204" charset="0"/>
-      <p:regular r:id="rId11"/>
-      <p:bold r:id="rId12"/>
+      <p:regular r:id="rId9"/>
+      <p:bold r:id="rId10"/>
     </p:embeddedFont>
     <p:embeddedFont>
       <p:font typeface="Inter Bold" panose="020B0604020202020204" charset="0"/>
-      <p:bold r:id="rId13"/>
-    </p:embeddedFont>
-    <p:embeddedFont>
-      <p:font typeface="Noto Serif" panose="02020600060500020200" pitchFamily="18" charset="0"/>
-      <p:regular r:id="rId14"/>
-      <p:bold r:id="rId15"/>
-      <p:italic r:id="rId16"/>
-      <p:boldItalic r:id="rId17"/>
+      <p:bold r:id="rId11"/>
     </p:embeddedFont>
     <p:embeddedFont>
       <p:font typeface="Poppins SemiBold" panose="00000700000000000000" pitchFamily="2" charset="0"/>
-      <p:bold r:id="rId18"/>
-      <p:boldItalic r:id="rId19"/>
+      <p:bold r:id="rId12"/>
+      <p:boldItalic r:id="rId13"/>
     </p:embeddedFont>
   </p:embeddedFontLst>
   <p:defaultTextStyle>
@@ -278,7 +269,7 @@
           <a:p>
             <a:fld id="{F9D2AD6E-DEDD-49A0-A4BE-7A081A9112DA}" type="datetimeFigureOut">
               <a:rPr lang="en-US" smtClean="0"/>
-              <a:t>8/18/2026</a:t>
+              <a:t>9/17/2026</a:t>
             </a:fld>
             <a:endParaRPr lang="en-US"/>
           </a:p>
@@ -454,7 +445,7 @@
           </a:lstStyle>
           <a:p>
             <a:fld id="{2AF9C1A6-4321-41FA-B001-4140F0E2457F}" type="datetimeFigureOut">
-              <a:t>8/18/2026</a:t>
+              <a:t>9/17/2026</a:t>
             </a:fld>
             <a:endParaRPr lang="en-US"/>
           </a:p>
@@ -797,309 +788,6 @@
     <p:extLst>
       <p:ext uri="{BB962C8B-B14F-4D97-AF65-F5344CB8AC3E}">
         <p14:creationId xmlns:p14="http://schemas.microsoft.com/office/powerpoint/2010/main" val="1832417047"/>
-      </p:ext>
-    </p:extLst>
-  </p:cSld>
-  <p:clrMapOvr>
-    <a:masterClrMapping/>
-  </p:clrMapOvr>
-</p:notes>
-</file>
-
-<file path=ppt/notesSlides/notesSlide2.xml><?xml version="1.0" encoding="utf-8"?>
-<p:notes xmlns:a="http://schemas.openxmlformats.org/drawingml/2006/main" xmlns:r="http://schemas.openxmlformats.org/officeDocument/2006/relationships" xmlns:p="http://schemas.openxmlformats.org/presentationml/2006/main">
-  <p:cSld>
-    <p:spTree>
-      <p:nvGrpSpPr>
-        <p:cNvPr id="1" name="">
-          <a:extLst>
-            <a:ext uri="{FF2B5EF4-FFF2-40B4-BE49-F238E27FC236}">
-              <a16:creationId xmlns:a16="http://schemas.microsoft.com/office/drawing/2014/main" id="{BB8DA34C-149A-57A8-DCCE-482263E209E7}"/>
-            </a:ext>
-          </a:extLst>
-        </p:cNvPr>
-        <p:cNvGrpSpPr/>
-        <p:nvPr/>
-      </p:nvGrpSpPr>
-      <p:grpSpPr>
-        <a:xfrm>
-          <a:off x="0" y="0"/>
-          <a:ext cx="0" cy="0"/>
-          <a:chOff x="0" y="0"/>
-          <a:chExt cx="0" cy="0"/>
-        </a:xfrm>
-      </p:grpSpPr>
-      <p:sp>
-        <p:nvSpPr>
-          <p:cNvPr id="2" name="Slide Image Placeholder 1">
-            <a:extLst>
-              <a:ext uri="{FF2B5EF4-FFF2-40B4-BE49-F238E27FC236}">
-                <a16:creationId xmlns:a16="http://schemas.microsoft.com/office/drawing/2014/main" id="{0212C817-AC27-CA90-93C2-204C3230EB4F}"/>
-              </a:ext>
-            </a:extLst>
-          </p:cNvPr>
-          <p:cNvSpPr>
-            <a:spLocks noGrp="1" noRot="1" noChangeAspect="1"/>
-          </p:cNvSpPr>
-          <p:nvPr>
-            <p:ph type="sldImg"/>
-          </p:nvPr>
-        </p:nvSpPr>
-        <p:spPr/>
-      </p:sp>
-      <p:sp>
-        <p:nvSpPr>
-          <p:cNvPr id="3" name="Notes Placeholder 2">
-            <a:extLst>
-              <a:ext uri="{FF2B5EF4-FFF2-40B4-BE49-F238E27FC236}">
-                <a16:creationId xmlns:a16="http://schemas.microsoft.com/office/drawing/2014/main" id="{73FC1774-130A-2B62-BCFA-16A9E5D06680}"/>
-              </a:ext>
-            </a:extLst>
-          </p:cNvPr>
-          <p:cNvSpPr>
-            <a:spLocks noGrp="1"/>
-          </p:cNvSpPr>
-          <p:nvPr>
-            <p:ph type="body" idx="1"/>
-          </p:nvPr>
-        </p:nvSpPr>
-        <p:spPr/>
-        <p:txBody>
-          <a:bodyPr/>
-          <a:lstStyle/>
-          <a:p>
-            <a:r>
-              <a:rPr lang="en-US" err="1">
-                <a:ea typeface="Calibri"/>
-                <a:cs typeface="Calibri"/>
-              </a:rPr>
-              <a:t>Milleks</a:t>
-            </a:r>
-            <a:r>
-              <a:rPr lang="en-US">
-                <a:ea typeface="Calibri"/>
-                <a:cs typeface="Calibri"/>
-              </a:rPr>
-              <a:t> </a:t>
-            </a:r>
-            <a:r>
-              <a:rPr lang="en-US" err="1">
-                <a:ea typeface="Calibri"/>
-                <a:cs typeface="Calibri"/>
-              </a:rPr>
-              <a:t>vajalik</a:t>
-            </a:r>
-            <a:r>
-              <a:rPr lang="en-US">
-                <a:ea typeface="Calibri"/>
-                <a:cs typeface="Calibri"/>
-              </a:rPr>
-              <a:t>? - Nii </a:t>
-            </a:r>
-            <a:r>
-              <a:rPr lang="en-US" err="1">
-                <a:ea typeface="Calibri"/>
-                <a:cs typeface="Calibri"/>
-              </a:rPr>
-              <a:t>enda</a:t>
-            </a:r>
-            <a:r>
-              <a:rPr lang="en-US">
-                <a:ea typeface="Calibri"/>
-                <a:cs typeface="Calibri"/>
-              </a:rPr>
-              <a:t> </a:t>
-            </a:r>
-            <a:r>
-              <a:rPr lang="en-US" err="1">
-                <a:ea typeface="Calibri"/>
-                <a:cs typeface="Calibri"/>
-              </a:rPr>
-              <a:t>kui</a:t>
-            </a:r>
-            <a:r>
-              <a:rPr lang="en-US">
-                <a:ea typeface="Calibri"/>
-                <a:cs typeface="Calibri"/>
-              </a:rPr>
-              <a:t> ka </a:t>
-            </a:r>
-            <a:r>
-              <a:rPr lang="en-US" err="1">
-                <a:ea typeface="Calibri"/>
-                <a:cs typeface="Calibri"/>
-              </a:rPr>
-              <a:t>kolleegide</a:t>
-            </a:r>
-            <a:r>
-              <a:rPr lang="en-US">
-                <a:ea typeface="Calibri"/>
-                <a:cs typeface="Calibri"/>
-              </a:rPr>
-              <a:t> </a:t>
-            </a:r>
-            <a:r>
-              <a:rPr lang="en-US" err="1">
-                <a:ea typeface="Calibri"/>
-                <a:cs typeface="Calibri"/>
-              </a:rPr>
-              <a:t>jaoks</a:t>
-            </a:r>
-            <a:r>
-              <a:rPr lang="en-US">
-                <a:ea typeface="Calibri"/>
-                <a:cs typeface="Calibri"/>
-              </a:rPr>
-              <a:t> </a:t>
-            </a:r>
-            <a:r>
-              <a:rPr lang="en-US" err="1">
-                <a:ea typeface="Calibri"/>
-                <a:cs typeface="Calibri"/>
-              </a:rPr>
-              <a:t>kirjeldamine</a:t>
-            </a:r>
-            <a:r>
-              <a:rPr lang="en-US">
-                <a:ea typeface="Calibri"/>
-                <a:cs typeface="Calibri"/>
-              </a:rPr>
-              <a:t>, </a:t>
-            </a:r>
-            <a:r>
-              <a:rPr lang="en-US" err="1">
-                <a:ea typeface="Calibri"/>
-                <a:cs typeface="Calibri"/>
-              </a:rPr>
-              <a:t>teada</a:t>
-            </a:r>
-            <a:r>
-              <a:rPr lang="en-US">
-                <a:ea typeface="Calibri"/>
-                <a:cs typeface="Calibri"/>
-              </a:rPr>
-              <a:t>, et </a:t>
-            </a:r>
-            <a:r>
-              <a:rPr lang="en-US" err="1">
-                <a:ea typeface="Calibri"/>
-                <a:cs typeface="Calibri"/>
-              </a:rPr>
-              <a:t>miks</a:t>
-            </a:r>
-            <a:r>
-              <a:rPr lang="en-US">
-                <a:ea typeface="Calibri"/>
-                <a:cs typeface="Calibri"/>
-              </a:rPr>
-              <a:t> ja </a:t>
-            </a:r>
-            <a:r>
-              <a:rPr lang="en-US" err="1">
-                <a:ea typeface="Calibri"/>
-                <a:cs typeface="Calibri"/>
-              </a:rPr>
-              <a:t>kuidas</a:t>
-            </a:r>
-            <a:r>
-              <a:rPr lang="en-US">
-                <a:ea typeface="Calibri"/>
-                <a:cs typeface="Calibri"/>
-              </a:rPr>
-              <a:t> </a:t>
-            </a:r>
-            <a:r>
-              <a:rPr lang="en-US" err="1">
-                <a:ea typeface="Calibri"/>
-                <a:cs typeface="Calibri"/>
-              </a:rPr>
-              <a:t>mingeid</a:t>
-            </a:r>
-            <a:r>
-              <a:rPr lang="en-US">
-                <a:ea typeface="Calibri"/>
-                <a:cs typeface="Calibri"/>
-              </a:rPr>
-              <a:t> </a:t>
-            </a:r>
-            <a:r>
-              <a:rPr lang="en-US" err="1">
-                <a:ea typeface="Calibri"/>
-                <a:cs typeface="Calibri"/>
-              </a:rPr>
-              <a:t>otsuseid</a:t>
-            </a:r>
-            <a:r>
-              <a:rPr lang="en-US">
-                <a:ea typeface="Calibri"/>
-                <a:cs typeface="Calibri"/>
-              </a:rPr>
-              <a:t> ja </a:t>
-            </a:r>
-            <a:r>
-              <a:rPr lang="en-US" err="1">
-                <a:ea typeface="Calibri"/>
-                <a:cs typeface="Calibri"/>
-              </a:rPr>
-              <a:t>muutusi</a:t>
-            </a:r>
-            <a:r>
-              <a:rPr lang="en-US">
-                <a:ea typeface="Calibri"/>
-                <a:cs typeface="Calibri"/>
-              </a:rPr>
-              <a:t> on </a:t>
-            </a:r>
-            <a:r>
-              <a:rPr lang="en-US" err="1">
-                <a:ea typeface="Calibri"/>
-                <a:cs typeface="Calibri"/>
-              </a:rPr>
-              <a:t>tehtud</a:t>
-            </a:r>
-            <a:r>
-              <a:rPr lang="en-US">
-                <a:ea typeface="Calibri"/>
-                <a:cs typeface="Calibri"/>
-              </a:rPr>
-              <a:t>.</a:t>
-            </a:r>
-          </a:p>
-        </p:txBody>
-      </p:sp>
-      <p:sp>
-        <p:nvSpPr>
-          <p:cNvPr id="4" name="Slide Number Placeholder 3">
-            <a:extLst>
-              <a:ext uri="{FF2B5EF4-FFF2-40B4-BE49-F238E27FC236}">
-                <a16:creationId xmlns:a16="http://schemas.microsoft.com/office/drawing/2014/main" id="{D12428F6-B692-59EB-721A-51F223C670DE}"/>
-              </a:ext>
-            </a:extLst>
-          </p:cNvPr>
-          <p:cNvSpPr>
-            <a:spLocks noGrp="1"/>
-          </p:cNvSpPr>
-          <p:nvPr>
-            <p:ph type="sldNum" sz="quarter" idx="5"/>
-          </p:nvPr>
-        </p:nvSpPr>
-        <p:spPr/>
-        <p:txBody>
-          <a:bodyPr/>
-          <a:lstStyle/>
-          <a:p>
-            <a:fld id="{46699514-027B-49BD-8B49-5054CA40ECF4}" type="slidenum">
-              <a:rPr lang="en-US"/>
-              <a:t>4</a:t>
-            </a:fld>
-            <a:endParaRPr lang="en-US"/>
-          </a:p>
-        </p:txBody>
-      </p:sp>
-    </p:spTree>
-    <p:extLst>
-      <p:ext uri="{BB962C8B-B14F-4D97-AF65-F5344CB8AC3E}">
-        <p14:creationId xmlns:p14="http://schemas.microsoft.com/office/powerpoint/2010/main" val="540613206"/>
       </p:ext>
     </p:extLst>
   </p:cSld>
@@ -12236,7 +11924,7 @@
           <a:p>
             <a:fld id="{DE840A40-73C8-4048-8140-49F5D65BB431}" type="datetimeFigureOut">
               <a:rPr lang="et-EE" smtClean="0"/>
-              <a:t>18.08.2026</a:t>
+              <a:t>17.09.2026</a:t>
             </a:fld>
             <a:endParaRPr lang="et-EE"/>
           </a:p>
@@ -24881,1535 +24569,6 @@
 </p:sld>
 </file>
 
-<file path=ppt/slides/slide3.xml><?xml version="1.0" encoding="utf-8"?>
-<p:sld xmlns:a="http://schemas.openxmlformats.org/drawingml/2006/main" xmlns:r="http://schemas.openxmlformats.org/officeDocument/2006/relationships" xmlns:p="http://schemas.openxmlformats.org/presentationml/2006/main">
-  <p:cSld>
-    <p:spTree>
-      <p:nvGrpSpPr>
-        <p:cNvPr id="1" name="">
-          <a:extLst>
-            <a:ext uri="{FF2B5EF4-FFF2-40B4-BE49-F238E27FC236}">
-              <a16:creationId xmlns:a16="http://schemas.microsoft.com/office/drawing/2014/main" id="{15FF916F-3A2C-85BA-9906-09B4A79C0272}"/>
-            </a:ext>
-          </a:extLst>
-        </p:cNvPr>
-        <p:cNvGrpSpPr/>
-        <p:nvPr/>
-      </p:nvGrpSpPr>
-      <p:grpSpPr>
-        <a:xfrm>
-          <a:off x="0" y="0"/>
-          <a:ext cx="0" cy="0"/>
-          <a:chOff x="0" y="0"/>
-          <a:chExt cx="0" cy="0"/>
-        </a:xfrm>
-      </p:grpSpPr>
-      <p:sp>
-        <p:nvSpPr>
-          <p:cNvPr id="2" name="Title 1">
-            <a:extLst>
-              <a:ext uri="{FF2B5EF4-FFF2-40B4-BE49-F238E27FC236}">
-                <a16:creationId xmlns:a16="http://schemas.microsoft.com/office/drawing/2014/main" id="{D4725537-CB3E-C083-F8A7-F00B6AE12D6E}"/>
-              </a:ext>
-            </a:extLst>
-          </p:cNvPr>
-          <p:cNvSpPr>
-            <a:spLocks noGrp="1"/>
-          </p:cNvSpPr>
-          <p:nvPr>
-            <p:ph type="ctrTitle"/>
-          </p:nvPr>
-        </p:nvSpPr>
-        <p:spPr>
-          <a:xfrm>
-            <a:off x="614923" y="479570"/>
-            <a:ext cx="10044112" cy="357043"/>
-          </a:xfrm>
-        </p:spPr>
-        <p:txBody>
-          <a:bodyPr/>
-          <a:lstStyle/>
-          <a:p>
-            <a:r>
-              <a:rPr lang="en-US" b="1" dirty="0" err="1"/>
-              <a:t>Lõputöö</a:t>
-            </a:r>
-            <a:r>
-              <a:rPr lang="en-US" b="1" dirty="0"/>
-              <a:t> </a:t>
-            </a:r>
-            <a:r>
-              <a:rPr lang="en-US" b="1" dirty="0" err="1"/>
-              <a:t>osad</a:t>
-            </a:r>
-            <a:endParaRPr lang="en-US" dirty="0"/>
-          </a:p>
-        </p:txBody>
-      </p:sp>
-      <p:sp>
-        <p:nvSpPr>
-          <p:cNvPr id="3" name="Content Placeholder 2">
-            <a:extLst>
-              <a:ext uri="{FF2B5EF4-FFF2-40B4-BE49-F238E27FC236}">
-                <a16:creationId xmlns:a16="http://schemas.microsoft.com/office/drawing/2014/main" id="{721CFECB-31FC-C645-D35E-8C1758638C04}"/>
-              </a:ext>
-            </a:extLst>
-          </p:cNvPr>
-          <p:cNvSpPr>
-            <a:spLocks noGrp="1"/>
-          </p:cNvSpPr>
-          <p:nvPr>
-            <p:ph sz="quarter" idx="10"/>
-          </p:nvPr>
-        </p:nvSpPr>
-        <p:spPr/>
-        <p:txBody>
-          <a:bodyPr/>
-          <a:lstStyle/>
-          <a:p>
-            <a:pPr marL="457200" indent="-457200">
-              <a:lnSpc>
-                <a:spcPct val="150000"/>
-              </a:lnSpc>
-              <a:buAutoNum type="arabicPeriod"/>
-            </a:pPr>
-            <a:r>
-              <a:rPr lang="en-US" sz="2000" err="1">
-                <a:ea typeface="Inter"/>
-                <a:cs typeface="Noto Serif"/>
-              </a:rPr>
-              <a:t>Ettevõtte</a:t>
-            </a:r>
-            <a:r>
-              <a:rPr lang="en-US" sz="2000">
-                <a:ea typeface="Inter"/>
-                <a:cs typeface="Noto Serif"/>
-              </a:rPr>
-              <a:t> ja </a:t>
-            </a:r>
-            <a:r>
-              <a:rPr lang="en-US" sz="2000" err="1">
-                <a:ea typeface="Inter"/>
-                <a:cs typeface="Noto Serif"/>
-              </a:rPr>
-              <a:t>uurimisprobleemi</a:t>
-            </a:r>
-            <a:r>
-              <a:rPr lang="en-US" sz="2000">
-                <a:ea typeface="Inter"/>
-                <a:cs typeface="Noto Serif"/>
-              </a:rPr>
-              <a:t> </a:t>
-            </a:r>
-            <a:r>
-              <a:rPr lang="en-US" sz="2000" err="1">
-                <a:ea typeface="Inter"/>
-                <a:cs typeface="Noto Serif"/>
-              </a:rPr>
-              <a:t>tutvustus</a:t>
-            </a:r>
-            <a:endParaRPr lang="en-US" sz="2000" err="1">
-              <a:cs typeface="Noto Serif"/>
-            </a:endParaRPr>
-          </a:p>
-          <a:p>
-            <a:pPr marL="457200" indent="-457200">
-              <a:lnSpc>
-                <a:spcPct val="150000"/>
-              </a:lnSpc>
-              <a:buClr>
-                <a:srgbClr val="121212"/>
-              </a:buClr>
-              <a:buAutoNum type="arabicPeriod"/>
-            </a:pPr>
-            <a:r>
-              <a:rPr lang="en-US" sz="2000" err="1">
-                <a:ea typeface="Inter"/>
-                <a:cs typeface="Noto Serif"/>
-              </a:rPr>
-              <a:t>Uurimisplaan</a:t>
-            </a:r>
-            <a:endParaRPr lang="en-US" sz="2000" err="1">
-              <a:cs typeface="Noto Serif"/>
-            </a:endParaRPr>
-          </a:p>
-          <a:p>
-            <a:pPr marL="457200" indent="-457200">
-              <a:lnSpc>
-                <a:spcPct val="150000"/>
-              </a:lnSpc>
-              <a:buClr>
-                <a:srgbClr val="121212"/>
-              </a:buClr>
-              <a:buAutoNum type="arabicPeriod"/>
-            </a:pPr>
-            <a:r>
-              <a:rPr lang="en-US" sz="2000" err="1">
-                <a:ea typeface="Inter"/>
-                <a:cs typeface="Noto Serif"/>
-              </a:rPr>
-              <a:t>Andmekaitse</a:t>
-            </a:r>
-            <a:r>
-              <a:rPr lang="en-US" sz="2000">
-                <a:ea typeface="Inter"/>
-                <a:cs typeface="Noto Serif"/>
-              </a:rPr>
-              <a:t> </a:t>
-            </a:r>
-            <a:r>
-              <a:rPr lang="en-US" sz="2000" err="1">
-                <a:ea typeface="Inter"/>
-                <a:cs typeface="Noto Serif"/>
-              </a:rPr>
-              <a:t>kirjeldus</a:t>
-            </a:r>
-            <a:r>
-              <a:rPr lang="en-US" sz="2000">
-                <a:ea typeface="Inter"/>
-                <a:cs typeface="Noto Serif"/>
-              </a:rPr>
-              <a:t> – mis </a:t>
-            </a:r>
-            <a:r>
-              <a:rPr lang="en-US" sz="2000" err="1">
-                <a:ea typeface="Inter"/>
-                <a:cs typeface="Noto Serif"/>
-              </a:rPr>
-              <a:t>alustel</a:t>
-            </a:r>
-            <a:r>
-              <a:rPr lang="en-US" sz="2000">
-                <a:ea typeface="Inter"/>
-                <a:cs typeface="Noto Serif"/>
-              </a:rPr>
-              <a:t> </a:t>
-            </a:r>
-            <a:r>
-              <a:rPr lang="en-US" sz="2000" err="1">
-                <a:ea typeface="Inter"/>
-                <a:cs typeface="Noto Serif"/>
-              </a:rPr>
-              <a:t>andmeid</a:t>
-            </a:r>
-            <a:r>
-              <a:rPr lang="en-US" sz="2000">
-                <a:ea typeface="Inter"/>
-                <a:cs typeface="Noto Serif"/>
-              </a:rPr>
-              <a:t> </a:t>
-            </a:r>
-            <a:r>
-              <a:rPr lang="en-US" sz="2000" err="1">
-                <a:ea typeface="Inter"/>
-                <a:cs typeface="Noto Serif"/>
-              </a:rPr>
-              <a:t>töödeldakse</a:t>
-            </a:r>
-            <a:r>
-              <a:rPr lang="en-US" sz="2000">
-                <a:ea typeface="Inter"/>
-                <a:cs typeface="Noto Serif"/>
-              </a:rPr>
-              <a:t>?</a:t>
-            </a:r>
-            <a:endParaRPr lang="en-US" sz="2000">
-              <a:cs typeface="Noto Serif"/>
-            </a:endParaRPr>
-          </a:p>
-          <a:p>
-            <a:pPr marL="457200" indent="-457200">
-              <a:lnSpc>
-                <a:spcPct val="150000"/>
-              </a:lnSpc>
-              <a:buClr>
-                <a:srgbClr val="121212"/>
-              </a:buClr>
-              <a:buAutoNum type="arabicPeriod"/>
-            </a:pPr>
-            <a:r>
-              <a:rPr lang="en-US" sz="2000" err="1">
-                <a:ea typeface="Inter"/>
-                <a:cs typeface="Noto Serif"/>
-              </a:rPr>
-              <a:t>Ärisõnastik</a:t>
-            </a:r>
-            <a:r>
-              <a:rPr lang="en-US" sz="2000">
-                <a:ea typeface="Inter"/>
-                <a:cs typeface="Noto Serif"/>
-              </a:rPr>
-              <a:t>, </a:t>
-            </a:r>
-            <a:r>
-              <a:rPr lang="en-US" sz="2000" err="1">
-                <a:ea typeface="Inter"/>
-                <a:cs typeface="Noto Serif"/>
-              </a:rPr>
-              <a:t>andmemudel</a:t>
-            </a:r>
-            <a:r>
-              <a:rPr lang="en-US" sz="2000">
-                <a:ea typeface="Inter"/>
-                <a:cs typeface="Noto Serif"/>
-              </a:rPr>
-              <a:t>, </a:t>
-            </a:r>
-            <a:r>
-              <a:rPr lang="en-US" sz="2000" err="1">
-                <a:ea typeface="Inter"/>
-                <a:cs typeface="Noto Serif"/>
-              </a:rPr>
-              <a:t>andmesõnastik</a:t>
-            </a:r>
-            <a:endParaRPr lang="en-US" sz="2000" err="1">
-              <a:cs typeface="Noto Serif"/>
-            </a:endParaRPr>
-          </a:p>
-          <a:p>
-            <a:pPr marL="457200" indent="-457200">
-              <a:lnSpc>
-                <a:spcPct val="150000"/>
-              </a:lnSpc>
-              <a:buClr>
-                <a:srgbClr val="121212"/>
-              </a:buClr>
-              <a:buAutoNum type="arabicPeriod"/>
-            </a:pPr>
-            <a:r>
-              <a:rPr lang="en-US" sz="2000" err="1">
-                <a:ea typeface="Inter"/>
-                <a:cs typeface="Noto Serif"/>
-              </a:rPr>
-              <a:t>Andmevoog</a:t>
-            </a:r>
-            <a:endParaRPr lang="en-US" sz="2000" err="1">
-              <a:cs typeface="Noto Serif"/>
-            </a:endParaRPr>
-          </a:p>
-          <a:p>
-            <a:pPr marL="457200" indent="-457200">
-              <a:lnSpc>
-                <a:spcPct val="150000"/>
-              </a:lnSpc>
-              <a:buClr>
-                <a:srgbClr val="121212"/>
-              </a:buClr>
-              <a:buAutoNum type="arabicPeriod"/>
-            </a:pPr>
-            <a:r>
-              <a:rPr lang="en-US" sz="2000" err="1">
-                <a:ea typeface="Inter"/>
-                <a:cs typeface="Noto Serif"/>
-              </a:rPr>
-              <a:t>Näidisandmestiku</a:t>
-            </a:r>
-            <a:r>
-              <a:rPr lang="en-US" sz="2000">
-                <a:ea typeface="Inter"/>
-                <a:cs typeface="Noto Serif"/>
-              </a:rPr>
-              <a:t> </a:t>
-            </a:r>
-            <a:r>
-              <a:rPr lang="en-US" sz="2000" err="1">
-                <a:ea typeface="Inter"/>
-                <a:cs typeface="Noto Serif"/>
-              </a:rPr>
-              <a:t>loomine</a:t>
-            </a:r>
-            <a:endParaRPr lang="en-US" sz="2000" err="1">
-              <a:cs typeface="Noto Serif"/>
-            </a:endParaRPr>
-          </a:p>
-          <a:p>
-            <a:pPr marL="457200" indent="-457200">
-              <a:lnSpc>
-                <a:spcPct val="150000"/>
-              </a:lnSpc>
-              <a:buClr>
-                <a:srgbClr val="121212"/>
-              </a:buClr>
-              <a:buAutoNum type="arabicPeriod"/>
-            </a:pPr>
-            <a:r>
-              <a:rPr lang="en-US" sz="2000" err="1">
-                <a:ea typeface="Inter"/>
-                <a:cs typeface="Noto Serif"/>
-              </a:rPr>
-              <a:t>Andmete</a:t>
-            </a:r>
-            <a:r>
-              <a:rPr lang="en-US" sz="2000">
-                <a:ea typeface="Inter"/>
-                <a:cs typeface="Noto Serif"/>
-              </a:rPr>
-              <a:t> </a:t>
-            </a:r>
-            <a:r>
-              <a:rPr lang="en-US" sz="2000" err="1">
-                <a:ea typeface="Inter"/>
-                <a:cs typeface="Noto Serif"/>
-              </a:rPr>
-              <a:t>kvaliteedi</a:t>
-            </a:r>
-            <a:r>
-              <a:rPr lang="en-US" sz="2000">
-                <a:ea typeface="Inter"/>
-                <a:cs typeface="Noto Serif"/>
-              </a:rPr>
-              <a:t> </a:t>
-            </a:r>
-            <a:r>
-              <a:rPr lang="en-US" sz="2000" err="1">
-                <a:ea typeface="Inter"/>
-                <a:cs typeface="Noto Serif"/>
-              </a:rPr>
-              <a:t>kontroll</a:t>
-            </a:r>
-            <a:endParaRPr lang="en-US" sz="2000">
-              <a:cs typeface="Noto Serif"/>
-            </a:endParaRPr>
-          </a:p>
-          <a:p>
-            <a:pPr marL="457200" indent="-457200">
-              <a:lnSpc>
-                <a:spcPct val="150000"/>
-              </a:lnSpc>
-              <a:buClr>
-                <a:srgbClr val="121212"/>
-              </a:buClr>
-              <a:buAutoNum type="arabicPeriod"/>
-            </a:pPr>
-            <a:r>
-              <a:rPr lang="en-US" sz="2000" err="1">
-                <a:ea typeface="Inter"/>
-                <a:cs typeface="Noto Serif"/>
-              </a:rPr>
-              <a:t>Andmete</a:t>
-            </a:r>
-            <a:r>
-              <a:rPr lang="en-US" sz="2000">
-                <a:ea typeface="Inter"/>
-                <a:cs typeface="Noto Serif"/>
-              </a:rPr>
-              <a:t> </a:t>
-            </a:r>
-            <a:r>
-              <a:rPr lang="en-US" sz="2000" err="1">
-                <a:ea typeface="Inter"/>
-                <a:cs typeface="Noto Serif"/>
-              </a:rPr>
-              <a:t>eksploratiivne</a:t>
-            </a:r>
-            <a:r>
-              <a:rPr lang="en-US" sz="2000">
-                <a:ea typeface="Inter"/>
-                <a:cs typeface="Noto Serif"/>
-              </a:rPr>
-              <a:t> </a:t>
-            </a:r>
-            <a:r>
-              <a:rPr lang="en-US" sz="2000" err="1">
-                <a:ea typeface="Inter"/>
-                <a:cs typeface="Noto Serif"/>
-              </a:rPr>
-              <a:t>analüüs</a:t>
-            </a:r>
-            <a:endParaRPr lang="en-US" sz="2000">
-              <a:cs typeface="Noto Serif"/>
-            </a:endParaRPr>
-          </a:p>
-          <a:p>
-            <a:pPr marL="457200" indent="-457200">
-              <a:lnSpc>
-                <a:spcPct val="150000"/>
-              </a:lnSpc>
-              <a:buClr>
-                <a:srgbClr val="121212"/>
-              </a:buClr>
-              <a:buAutoNum type="arabicPeriod"/>
-            </a:pPr>
-            <a:r>
-              <a:rPr lang="en-US" sz="2000" err="1">
-                <a:ea typeface="Inter"/>
-                <a:cs typeface="Noto Serif"/>
-              </a:rPr>
-              <a:t>Andmete</a:t>
-            </a:r>
-            <a:r>
-              <a:rPr lang="en-US" sz="2000">
-                <a:ea typeface="Inter"/>
-                <a:cs typeface="Noto Serif"/>
-              </a:rPr>
-              <a:t> </a:t>
-            </a:r>
-            <a:r>
-              <a:rPr lang="en-US" sz="2000" err="1">
-                <a:ea typeface="Inter"/>
-                <a:cs typeface="Noto Serif"/>
-              </a:rPr>
-              <a:t>statistiline</a:t>
-            </a:r>
-            <a:r>
-              <a:rPr lang="en-US" sz="2000">
-                <a:ea typeface="Inter"/>
-                <a:cs typeface="Noto Serif"/>
-              </a:rPr>
-              <a:t> </a:t>
-            </a:r>
-            <a:r>
-              <a:rPr lang="en-US" sz="2000" err="1">
-                <a:ea typeface="Inter"/>
-                <a:cs typeface="Noto Serif"/>
-              </a:rPr>
-              <a:t>analüüs</a:t>
-            </a:r>
-            <a:endParaRPr lang="en-US" sz="2000" err="1">
-              <a:cs typeface="Noto Serif"/>
-            </a:endParaRPr>
-          </a:p>
-          <a:p>
-            <a:pPr marL="457200" indent="-457200">
-              <a:lnSpc>
-                <a:spcPct val="150000"/>
-              </a:lnSpc>
-              <a:buClr>
-                <a:srgbClr val="121212"/>
-              </a:buClr>
-              <a:buAutoNum type="arabicPeriod"/>
-            </a:pPr>
-            <a:r>
-              <a:rPr lang="en-US" sz="2000" err="1">
-                <a:ea typeface="Inter"/>
-                <a:cs typeface="Noto Serif"/>
-              </a:rPr>
-              <a:t>Kirjeldav</a:t>
-            </a:r>
-            <a:r>
-              <a:rPr lang="en-US" sz="2000">
-                <a:ea typeface="Inter"/>
-                <a:cs typeface="Noto Serif"/>
-              </a:rPr>
-              <a:t> </a:t>
-            </a:r>
-            <a:r>
-              <a:rPr lang="en-US" sz="2000" err="1">
-                <a:ea typeface="Inter"/>
-                <a:cs typeface="Noto Serif"/>
-              </a:rPr>
-              <a:t>raport</a:t>
-            </a:r>
-            <a:r>
-              <a:rPr lang="en-US" sz="2000">
-                <a:ea typeface="Inter"/>
-                <a:cs typeface="Noto Serif"/>
-              </a:rPr>
-              <a:t> / </a:t>
-            </a:r>
-            <a:r>
-              <a:rPr lang="en-US" sz="2000" err="1">
-                <a:ea typeface="Inter"/>
-                <a:cs typeface="Noto Serif"/>
-              </a:rPr>
-              <a:t>analüüs</a:t>
-            </a:r>
-            <a:endParaRPr lang="en-US" sz="2000" err="1">
-              <a:cs typeface="Noto Serif"/>
-            </a:endParaRPr>
-          </a:p>
-          <a:p>
-            <a:pPr marL="457200" indent="-457200">
-              <a:lnSpc>
-                <a:spcPct val="150000"/>
-              </a:lnSpc>
-              <a:buClr>
-                <a:srgbClr val="121212"/>
-              </a:buClr>
-              <a:buAutoNum type="arabicPeriod"/>
-            </a:pPr>
-            <a:r>
-              <a:rPr lang="en-US" sz="2000" err="1">
-                <a:ea typeface="Inter"/>
-                <a:cs typeface="Noto Serif"/>
-              </a:rPr>
-              <a:t>Andmelugu</a:t>
-            </a:r>
-            <a:r>
-              <a:rPr lang="en-US" sz="2000">
-                <a:ea typeface="Inter"/>
-                <a:cs typeface="Noto Serif"/>
-              </a:rPr>
-              <a:t>, </a:t>
-            </a:r>
-            <a:r>
-              <a:rPr lang="en-US" sz="2000" err="1">
-                <a:ea typeface="Inter"/>
-                <a:cs typeface="Noto Serif"/>
-              </a:rPr>
-              <a:t>järeldused</a:t>
-            </a:r>
-            <a:endParaRPr lang="en-US" sz="2000" err="1">
-              <a:cs typeface="Noto Serif"/>
-            </a:endParaRPr>
-          </a:p>
-          <a:p>
-            <a:pPr marL="342900" indent="-342900">
-              <a:lnSpc>
-                <a:spcPct val="150000"/>
-              </a:lnSpc>
-              <a:buClr>
-                <a:srgbClr val="121212"/>
-              </a:buClr>
-              <a:buFont typeface="Inter" panose="020B0502030000000004" pitchFamily="34" charset="0"/>
-              <a:buAutoNum type="arabicPeriod"/>
-            </a:pPr>
-            <a:endParaRPr lang="en-US" sz="2400">
-              <a:cs typeface="Noto Serif"/>
-            </a:endParaRPr>
-          </a:p>
-          <a:p>
-            <a:pPr marL="342900" indent="-342900">
-              <a:lnSpc>
-                <a:spcPct val="150000"/>
-              </a:lnSpc>
-              <a:buClr>
-                <a:srgbClr val="121212"/>
-              </a:buClr>
-              <a:buFont typeface="Inter" panose="020B0502030000000004" pitchFamily="34" charset="0"/>
-              <a:buAutoNum type="arabicPeriod"/>
-            </a:pPr>
-            <a:endParaRPr lang="en-US" sz="2400">
-              <a:cs typeface="Arial"/>
-            </a:endParaRPr>
-          </a:p>
-          <a:p>
-            <a:pPr marL="857250" lvl="1" indent="-342900">
-              <a:lnSpc>
-                <a:spcPct val="150000"/>
-              </a:lnSpc>
-              <a:buFont typeface="Arial,Sans-Serif" panose="020B0502030000000004" pitchFamily="34" charset="0"/>
-              <a:buChar char="o"/>
-            </a:pPr>
-            <a:endParaRPr lang="en-US" sz="2400">
-              <a:cs typeface="Arial"/>
-            </a:endParaRPr>
-          </a:p>
-          <a:p>
-            <a:pPr marL="342900" indent="-342900">
-              <a:lnSpc>
-                <a:spcPct val="150000"/>
-              </a:lnSpc>
-              <a:buAutoNum type="arabicPeriod"/>
-            </a:pPr>
-            <a:endParaRPr lang="en-US" sz="2400">
-              <a:cs typeface="Arial"/>
-            </a:endParaRPr>
-          </a:p>
-          <a:p>
-            <a:pPr marL="514350" indent="-514350">
-              <a:lnSpc>
-                <a:spcPct val="150000"/>
-              </a:lnSpc>
-              <a:buAutoNum type="arabicPeriod"/>
-            </a:pPr>
-            <a:endParaRPr lang="en-US" sz="2800">
-              <a:cs typeface="Arial"/>
-            </a:endParaRPr>
-          </a:p>
-          <a:p>
-            <a:pPr marL="0" indent="0">
-              <a:lnSpc>
-                <a:spcPct val="150000"/>
-              </a:lnSpc>
-              <a:buNone/>
-            </a:pPr>
-            <a:endParaRPr lang="en-US" sz="2800"/>
-          </a:p>
-        </p:txBody>
-      </p:sp>
-    </p:spTree>
-    <p:extLst>
-      <p:ext uri="{BB962C8B-B14F-4D97-AF65-F5344CB8AC3E}">
-        <p14:creationId xmlns:p14="http://schemas.microsoft.com/office/powerpoint/2010/main" val="645017635"/>
-      </p:ext>
-    </p:extLst>
-  </p:cSld>
-  <p:clrMapOvr>
-    <a:masterClrMapping/>
-  </p:clrMapOvr>
-</p:sld>
-</file>
-
-<file path=ppt/slides/slide4.xml><?xml version="1.0" encoding="utf-8"?>
-<p:sld xmlns:a="http://schemas.openxmlformats.org/drawingml/2006/main" xmlns:r="http://schemas.openxmlformats.org/officeDocument/2006/relationships" xmlns:p="http://schemas.openxmlformats.org/presentationml/2006/main">
-  <p:cSld>
-    <p:spTree>
-      <p:nvGrpSpPr>
-        <p:cNvPr id="1" name="">
-          <a:extLst>
-            <a:ext uri="{FF2B5EF4-FFF2-40B4-BE49-F238E27FC236}">
-              <a16:creationId xmlns:a16="http://schemas.microsoft.com/office/drawing/2014/main" id="{AA80EE9B-3020-A266-14D5-3A10FD23920C}"/>
-            </a:ext>
-          </a:extLst>
-        </p:cNvPr>
-        <p:cNvGrpSpPr/>
-        <p:nvPr/>
-      </p:nvGrpSpPr>
-      <p:grpSpPr>
-        <a:xfrm>
-          <a:off x="0" y="0"/>
-          <a:ext cx="0" cy="0"/>
-          <a:chOff x="0" y="0"/>
-          <a:chExt cx="0" cy="0"/>
-        </a:xfrm>
-      </p:grpSpPr>
-      <p:sp>
-        <p:nvSpPr>
-          <p:cNvPr id="2" name="Title 1">
-            <a:extLst>
-              <a:ext uri="{FF2B5EF4-FFF2-40B4-BE49-F238E27FC236}">
-                <a16:creationId xmlns:a16="http://schemas.microsoft.com/office/drawing/2014/main" id="{09CB3CE6-A314-B235-7804-1DB6617CEBB9}"/>
-              </a:ext>
-            </a:extLst>
-          </p:cNvPr>
-          <p:cNvSpPr>
-            <a:spLocks noGrp="1"/>
-          </p:cNvSpPr>
-          <p:nvPr>
-            <p:ph type="ctrTitle"/>
-          </p:nvPr>
-        </p:nvSpPr>
-        <p:spPr/>
-        <p:txBody>
-          <a:bodyPr/>
-          <a:lstStyle/>
-          <a:p>
-            <a:r>
-              <a:rPr lang="en-US" dirty="0" err="1"/>
-              <a:t>Versioonihaldus</a:t>
-            </a:r>
-            <a:r>
-              <a:rPr lang="en-US" dirty="0"/>
-              <a:t> – </a:t>
-            </a:r>
-            <a:r>
-              <a:rPr lang="en-US" dirty="0" err="1"/>
-              <a:t>muutuste</a:t>
-            </a:r>
-            <a:r>
-              <a:rPr lang="en-US" dirty="0"/>
-              <a:t> </a:t>
-            </a:r>
-            <a:r>
-              <a:rPr lang="en-US" dirty="0" err="1"/>
-              <a:t>üles</a:t>
-            </a:r>
-            <a:r>
-              <a:rPr lang="en-US" dirty="0"/>
-              <a:t> </a:t>
-            </a:r>
-            <a:r>
-              <a:rPr lang="en-US" dirty="0" err="1"/>
-              <a:t>laadimine</a:t>
-            </a:r>
-          </a:p>
-        </p:txBody>
-      </p:sp>
-      <p:sp>
-        <p:nvSpPr>
-          <p:cNvPr id="3" name="Content Placeholder 2">
-            <a:extLst>
-              <a:ext uri="{FF2B5EF4-FFF2-40B4-BE49-F238E27FC236}">
-                <a16:creationId xmlns:a16="http://schemas.microsoft.com/office/drawing/2014/main" id="{CF773C7E-895D-19CD-768D-5D677901F556}"/>
-              </a:ext>
-            </a:extLst>
-          </p:cNvPr>
-          <p:cNvSpPr>
-            <a:spLocks noGrp="1"/>
-          </p:cNvSpPr>
-          <p:nvPr>
-            <p:ph sz="quarter" idx="10"/>
-          </p:nvPr>
-        </p:nvSpPr>
-        <p:spPr/>
-        <p:txBody>
-          <a:bodyPr/>
-          <a:lstStyle/>
-          <a:p>
-            <a:pPr marL="457200" indent="-457200">
-              <a:lnSpc>
-                <a:spcPct val="150000"/>
-              </a:lnSpc>
-              <a:buClr>
-                <a:srgbClr val="121212"/>
-              </a:buClr>
-              <a:buAutoNum type="arabicPeriod"/>
-            </a:pPr>
-            <a:r>
-              <a:rPr lang="en-US" sz="2400" dirty="0">
-                <a:ea typeface="Inter"/>
-              </a:rPr>
-              <a:t>Tee </a:t>
-            </a:r>
-            <a:r>
-              <a:rPr lang="en-US" sz="2400" dirty="0" err="1">
-                <a:ea typeface="Inter"/>
-              </a:rPr>
-              <a:t>muutused</a:t>
-            </a:r>
-            <a:r>
-              <a:rPr lang="en-US" sz="2400" dirty="0">
-                <a:ea typeface="Inter"/>
-              </a:rPr>
-              <a:t> </a:t>
-            </a:r>
-            <a:r>
-              <a:rPr lang="en-US" sz="2400" dirty="0" err="1">
-                <a:ea typeface="Inter"/>
-              </a:rPr>
-              <a:t>kohalikus</a:t>
-            </a:r>
-            <a:r>
-              <a:rPr lang="en-US" sz="2400" dirty="0">
-                <a:ea typeface="Inter"/>
-              </a:rPr>
-              <a:t> </a:t>
-            </a:r>
-            <a:r>
-              <a:rPr lang="en-US" sz="2400" dirty="0" err="1">
-                <a:ea typeface="Inter"/>
-              </a:rPr>
-              <a:t>kaustas</a:t>
-            </a:r>
-            <a:endParaRPr lang="en-US" sz="2400" dirty="0">
-              <a:ea typeface="Inter"/>
-            </a:endParaRPr>
-          </a:p>
-          <a:p>
-            <a:pPr marL="400050" indent="-457200">
-              <a:lnSpc>
-                <a:spcPct val="150000"/>
-              </a:lnSpc>
-              <a:buClr>
-                <a:srgbClr val="121212"/>
-              </a:buClr>
-              <a:buAutoNum type="arabicPeriod"/>
-            </a:pPr>
-            <a:r>
-              <a:rPr lang="en-US" sz="2400" dirty="0">
-                <a:ea typeface="Inter"/>
-              </a:rPr>
-              <a:t>Vali </a:t>
-            </a:r>
-            <a:r>
-              <a:rPr lang="en-US" sz="2400" dirty="0" err="1">
-                <a:ea typeface="Inter"/>
-              </a:rPr>
-              <a:t>enda</a:t>
-            </a:r>
-            <a:r>
-              <a:rPr lang="en-US" sz="2400" dirty="0">
-                <a:ea typeface="Inter"/>
-              </a:rPr>
-              <a:t> Branch </a:t>
-            </a:r>
-            <a:r>
-              <a:rPr lang="en-US" sz="2400" dirty="0" err="1">
-                <a:ea typeface="Inter"/>
-              </a:rPr>
-              <a:t>või</a:t>
-            </a:r>
-            <a:r>
-              <a:rPr lang="en-US" sz="2400" dirty="0">
-                <a:ea typeface="Inter"/>
-              </a:rPr>
-              <a:t> loo </a:t>
-            </a:r>
-            <a:r>
-              <a:rPr lang="en-US" sz="2400" dirty="0" err="1">
-                <a:ea typeface="Inter"/>
-              </a:rPr>
-              <a:t>uus</a:t>
-            </a:r>
-            <a:r>
-              <a:rPr lang="en-US" sz="2400" dirty="0">
-                <a:ea typeface="Inter"/>
-              </a:rPr>
-              <a:t> Branch</a:t>
-            </a:r>
-            <a:endParaRPr lang="en-US" dirty="0"/>
-          </a:p>
-          <a:p>
-            <a:pPr marL="400050" indent="-457200">
-              <a:lnSpc>
-                <a:spcPct val="150000"/>
-              </a:lnSpc>
-              <a:buClr>
-                <a:srgbClr val="121212"/>
-              </a:buClr>
-              <a:buAutoNum type="arabicPeriod"/>
-            </a:pPr>
-            <a:r>
-              <a:rPr lang="en-US" sz="2400" dirty="0">
-                <a:ea typeface="Inter"/>
-              </a:rPr>
-              <a:t>VS Code: Pull from main</a:t>
-            </a:r>
-            <a:endParaRPr lang="en-US" dirty="0"/>
-          </a:p>
-          <a:p>
-            <a:pPr marL="400050" indent="-457200">
-              <a:lnSpc>
-                <a:spcPct val="150000"/>
-              </a:lnSpc>
-              <a:buClr>
-                <a:srgbClr val="121212"/>
-              </a:buClr>
-              <a:buAutoNum type="arabicPeriod"/>
-            </a:pPr>
-            <a:r>
-              <a:rPr lang="en-US" sz="2400" dirty="0">
-                <a:ea typeface="Inter"/>
-              </a:rPr>
-              <a:t>VS Code: Lisa </a:t>
-            </a:r>
-            <a:r>
-              <a:rPr lang="en-US" sz="2400" dirty="0" err="1">
-                <a:ea typeface="Inter"/>
-              </a:rPr>
-              <a:t>kommentaar</a:t>
-            </a:r>
-            <a:r>
-              <a:rPr lang="en-US" sz="2400" dirty="0">
-                <a:ea typeface="Inter"/>
-              </a:rPr>
-              <a:t> ja Commit</a:t>
-            </a:r>
-            <a:endParaRPr lang="en-US" sz="2400" dirty="0"/>
-          </a:p>
-          <a:p>
-            <a:pPr marL="400050" indent="-457200">
-              <a:lnSpc>
-                <a:spcPct val="150000"/>
-              </a:lnSpc>
-              <a:buClr>
-                <a:srgbClr val="121212"/>
-              </a:buClr>
-              <a:buAutoNum type="arabicPeriod"/>
-            </a:pPr>
-            <a:r>
-              <a:rPr lang="en-US" sz="2400" dirty="0">
-                <a:ea typeface="Inter"/>
-              </a:rPr>
-              <a:t>VS Code: Sync Changes</a:t>
-            </a:r>
-            <a:endParaRPr lang="en-US" sz="2400" dirty="0"/>
-          </a:p>
-          <a:p>
-            <a:pPr marL="400050" indent="-457200">
-              <a:lnSpc>
-                <a:spcPct val="150000"/>
-              </a:lnSpc>
-              <a:buClr>
-                <a:srgbClr val="121212"/>
-              </a:buClr>
-              <a:buAutoNum type="arabicPeriod"/>
-            </a:pPr>
-            <a:r>
-              <a:rPr lang="en-US" sz="2400" dirty="0" err="1">
-                <a:ea typeface="Inter"/>
-              </a:rPr>
-              <a:t>Github</a:t>
-            </a:r>
-            <a:r>
-              <a:rPr lang="en-US" sz="2400" dirty="0">
-                <a:ea typeface="Inter"/>
-              </a:rPr>
-              <a:t>: Vali </a:t>
-            </a:r>
-            <a:r>
-              <a:rPr lang="en-US" sz="2400" dirty="0" err="1">
-                <a:ea typeface="Inter"/>
-              </a:rPr>
-              <a:t>loodud</a:t>
-            </a:r>
-            <a:r>
-              <a:rPr lang="en-US" sz="2400" dirty="0">
-                <a:ea typeface="Inter"/>
-              </a:rPr>
-              <a:t> Branch</a:t>
-            </a:r>
-          </a:p>
-          <a:p>
-            <a:pPr marL="400050" indent="-457200">
-              <a:lnSpc>
-                <a:spcPct val="150000"/>
-              </a:lnSpc>
-              <a:buClr>
-                <a:srgbClr val="121212"/>
-              </a:buClr>
-              <a:buAutoNum type="arabicPeriod"/>
-            </a:pPr>
-            <a:r>
-              <a:rPr lang="en-US" sz="2400" dirty="0" err="1">
-                <a:ea typeface="Inter"/>
-              </a:rPr>
-              <a:t>Github</a:t>
-            </a:r>
-            <a:r>
-              <a:rPr lang="en-US" sz="2400" dirty="0">
-                <a:ea typeface="Inter"/>
-              </a:rPr>
-              <a:t>: </a:t>
-            </a:r>
-            <a:r>
-              <a:rPr lang="en-US" sz="2400" dirty="0" err="1">
-                <a:ea typeface="Inter"/>
-              </a:rPr>
-              <a:t>Kliki</a:t>
-            </a:r>
-            <a:r>
-              <a:rPr lang="en-US" sz="2400" dirty="0">
-                <a:ea typeface="Inter"/>
-              </a:rPr>
-              <a:t> "This branch is 1 commit ahead"</a:t>
-            </a:r>
-          </a:p>
-          <a:p>
-            <a:pPr marL="400050" indent="-457200">
-              <a:lnSpc>
-                <a:spcPct val="150000"/>
-              </a:lnSpc>
-              <a:buClr>
-                <a:srgbClr val="121212"/>
-              </a:buClr>
-              <a:buAutoNum type="arabicPeriod"/>
-            </a:pPr>
-            <a:r>
-              <a:rPr lang="en-US" sz="2400" dirty="0">
-                <a:ea typeface="Inter"/>
-              </a:rPr>
-              <a:t>GitHub: Create Pull Request</a:t>
-            </a:r>
-            <a:endParaRPr lang="en-US" sz="2400" dirty="0"/>
-          </a:p>
-          <a:p>
-            <a:pPr marL="400050" indent="-457200">
-              <a:lnSpc>
-                <a:spcPct val="150000"/>
-              </a:lnSpc>
-              <a:buClr>
-                <a:srgbClr val="121212"/>
-              </a:buClr>
-              <a:buAutoNum type="arabicPeriod"/>
-            </a:pPr>
-            <a:r>
-              <a:rPr lang="en-US" sz="2400" dirty="0">
-                <a:ea typeface="Inter"/>
-              </a:rPr>
-              <a:t>GitHub: Merge Pull Request</a:t>
-            </a:r>
-            <a:endParaRPr lang="en-US" sz="2400" dirty="0"/>
-          </a:p>
-          <a:p>
-            <a:pPr>
-              <a:buClr>
-                <a:srgbClr val="121212"/>
-              </a:buClr>
-              <a:buAutoNum type="arabicPeriod"/>
-            </a:pPr>
-            <a:endParaRPr lang="en-US" dirty="0"/>
-          </a:p>
-        </p:txBody>
-      </p:sp>
-    </p:spTree>
-    <p:extLst>
-      <p:ext uri="{BB962C8B-B14F-4D97-AF65-F5344CB8AC3E}">
-        <p14:creationId xmlns:p14="http://schemas.microsoft.com/office/powerpoint/2010/main" val="1694942831"/>
-      </p:ext>
-    </p:extLst>
-  </p:cSld>
-  <p:clrMapOvr>
-    <a:masterClrMapping/>
-  </p:clrMapOvr>
-  <p:timing>
-    <p:tnLst>
-      <p:par>
-        <p:cTn id="1" dur="indefinite" restart="never" nodeType="tmRoot">
-          <p:childTnLst>
-            <p:seq concurrent="1" nextAc="seek">
-              <p:cTn id="2" dur="indefinite" nodeType="mainSeq">
-                <p:childTnLst>
-                  <p:par>
-                    <p:cTn id="3" fill="hold">
-                      <p:stCondLst>
-                        <p:cond delay="indefinite"/>
-                      </p:stCondLst>
-                      <p:childTnLst>
-                        <p:par>
-                          <p:cTn id="4" fill="hold">
-                            <p:stCondLst>
-                              <p:cond delay="0"/>
-                            </p:stCondLst>
-                            <p:childTnLst>
-                              <p:par>
-                                <p:cTn id="5" presetID="1" presetClass="entr" presetSubtype="0" fill="hold" grpId="0" nodeType="clickEffect">
-                                  <p:stCondLst>
-                                    <p:cond delay="0"/>
-                                  </p:stCondLst>
-                                  <p:childTnLst>
-                                    <p:set>
-                                      <p:cBhvr>
-                                        <p:cTn id="6" dur="1" fill="hold">
-                                          <p:stCondLst>
-                                            <p:cond delay="0"/>
-                                          </p:stCondLst>
-                                        </p:cTn>
-                                        <p:tgtEl>
-                                          <p:spTgt spid="3">
-                                            <p:txEl>
-                                              <p:pRg st="0" end="0"/>
-                                            </p:txEl>
-                                          </p:spTgt>
-                                        </p:tgtEl>
-                                        <p:attrNameLst>
-                                          <p:attrName>style.visibility</p:attrName>
-                                        </p:attrNameLst>
-                                      </p:cBhvr>
-                                      <p:to>
-                                        <p:strVal val="visible"/>
-                                      </p:to>
-                                    </p:set>
-                                  </p:childTnLst>
-                                </p:cTn>
-                              </p:par>
-                            </p:childTnLst>
-                          </p:cTn>
-                        </p:par>
-                      </p:childTnLst>
-                    </p:cTn>
-                  </p:par>
-                  <p:par>
-                    <p:cTn id="7" fill="hold">
-                      <p:stCondLst>
-                        <p:cond delay="indefinite"/>
-                      </p:stCondLst>
-                      <p:childTnLst>
-                        <p:par>
-                          <p:cTn id="8" fill="hold">
-                            <p:stCondLst>
-                              <p:cond delay="0"/>
-                            </p:stCondLst>
-                            <p:childTnLst>
-                              <p:par>
-                                <p:cTn id="9" presetID="1" presetClass="entr" presetSubtype="0" fill="hold" grpId="0" nodeType="clickEffect">
-                                  <p:stCondLst>
-                                    <p:cond delay="0"/>
-                                  </p:stCondLst>
-                                  <p:childTnLst>
-                                    <p:set>
-                                      <p:cBhvr>
-                                        <p:cTn id="10" dur="1" fill="hold">
-                                          <p:stCondLst>
-                                            <p:cond delay="0"/>
-                                          </p:stCondLst>
-                                        </p:cTn>
-                                        <p:tgtEl>
-                                          <p:spTgt spid="3">
-                                            <p:txEl>
-                                              <p:pRg st="1" end="1"/>
-                                            </p:txEl>
-                                          </p:spTgt>
-                                        </p:tgtEl>
-                                        <p:attrNameLst>
-                                          <p:attrName>style.visibility</p:attrName>
-                                        </p:attrNameLst>
-                                      </p:cBhvr>
-                                      <p:to>
-                                        <p:strVal val="visible"/>
-                                      </p:to>
-                                    </p:set>
-                                  </p:childTnLst>
-                                </p:cTn>
-                              </p:par>
-                            </p:childTnLst>
-                          </p:cTn>
-                        </p:par>
-                      </p:childTnLst>
-                    </p:cTn>
-                  </p:par>
-                  <p:par>
-                    <p:cTn id="11" fill="hold">
-                      <p:stCondLst>
-                        <p:cond delay="indefinite"/>
-                      </p:stCondLst>
-                      <p:childTnLst>
-                        <p:par>
-                          <p:cTn id="12" fill="hold">
-                            <p:stCondLst>
-                              <p:cond delay="0"/>
-                            </p:stCondLst>
-                            <p:childTnLst>
-                              <p:par>
-                                <p:cTn id="13" presetID="1" presetClass="entr" presetSubtype="0" fill="hold" grpId="0" nodeType="clickEffect">
-                                  <p:stCondLst>
-                                    <p:cond delay="0"/>
-                                  </p:stCondLst>
-                                  <p:childTnLst>
-                                    <p:set>
-                                      <p:cBhvr>
-                                        <p:cTn id="14" dur="1" fill="hold">
-                                          <p:stCondLst>
-                                            <p:cond delay="0"/>
-                                          </p:stCondLst>
-                                        </p:cTn>
-                                        <p:tgtEl>
-                                          <p:spTgt spid="3">
-                                            <p:txEl>
-                                              <p:pRg st="2" end="2"/>
-                                            </p:txEl>
-                                          </p:spTgt>
-                                        </p:tgtEl>
-                                        <p:attrNameLst>
-                                          <p:attrName>style.visibility</p:attrName>
-                                        </p:attrNameLst>
-                                      </p:cBhvr>
-                                      <p:to>
-                                        <p:strVal val="visible"/>
-                                      </p:to>
-                                    </p:set>
-                                  </p:childTnLst>
-                                </p:cTn>
-                              </p:par>
-                            </p:childTnLst>
-                          </p:cTn>
-                        </p:par>
-                      </p:childTnLst>
-                    </p:cTn>
-                  </p:par>
-                  <p:par>
-                    <p:cTn id="15" fill="hold">
-                      <p:stCondLst>
-                        <p:cond delay="indefinite"/>
-                      </p:stCondLst>
-                      <p:childTnLst>
-                        <p:par>
-                          <p:cTn id="16" fill="hold">
-                            <p:stCondLst>
-                              <p:cond delay="0"/>
-                            </p:stCondLst>
-                            <p:childTnLst>
-                              <p:par>
-                                <p:cTn id="17" presetID="1" presetClass="entr" presetSubtype="0" fill="hold" grpId="0" nodeType="clickEffect">
-                                  <p:stCondLst>
-                                    <p:cond delay="0"/>
-                                  </p:stCondLst>
-                                  <p:childTnLst>
-                                    <p:set>
-                                      <p:cBhvr>
-                                        <p:cTn id="18" dur="1" fill="hold">
-                                          <p:stCondLst>
-                                            <p:cond delay="0"/>
-                                          </p:stCondLst>
-                                        </p:cTn>
-                                        <p:tgtEl>
-                                          <p:spTgt spid="3">
-                                            <p:txEl>
-                                              <p:pRg st="3" end="3"/>
-                                            </p:txEl>
-                                          </p:spTgt>
-                                        </p:tgtEl>
-                                        <p:attrNameLst>
-                                          <p:attrName>style.visibility</p:attrName>
-                                        </p:attrNameLst>
-                                      </p:cBhvr>
-                                      <p:to>
-                                        <p:strVal val="visible"/>
-                                      </p:to>
-                                    </p:set>
-                                  </p:childTnLst>
-                                </p:cTn>
-                              </p:par>
-                            </p:childTnLst>
-                          </p:cTn>
-                        </p:par>
-                      </p:childTnLst>
-                    </p:cTn>
-                  </p:par>
-                  <p:par>
-                    <p:cTn id="19" fill="hold">
-                      <p:stCondLst>
-                        <p:cond delay="indefinite"/>
-                      </p:stCondLst>
-                      <p:childTnLst>
-                        <p:par>
-                          <p:cTn id="20" fill="hold">
-                            <p:stCondLst>
-                              <p:cond delay="0"/>
-                            </p:stCondLst>
-                            <p:childTnLst>
-                              <p:par>
-                                <p:cTn id="21" presetID="1" presetClass="entr" presetSubtype="0" fill="hold" grpId="0" nodeType="clickEffect">
-                                  <p:stCondLst>
-                                    <p:cond delay="0"/>
-                                  </p:stCondLst>
-                                  <p:childTnLst>
-                                    <p:set>
-                                      <p:cBhvr>
-                                        <p:cTn id="22" dur="1" fill="hold">
-                                          <p:stCondLst>
-                                            <p:cond delay="0"/>
-                                          </p:stCondLst>
-                                        </p:cTn>
-                                        <p:tgtEl>
-                                          <p:spTgt spid="3">
-                                            <p:txEl>
-                                              <p:pRg st="4" end="4"/>
-                                            </p:txEl>
-                                          </p:spTgt>
-                                        </p:tgtEl>
-                                        <p:attrNameLst>
-                                          <p:attrName>style.visibility</p:attrName>
-                                        </p:attrNameLst>
-                                      </p:cBhvr>
-                                      <p:to>
-                                        <p:strVal val="visible"/>
-                                      </p:to>
-                                    </p:set>
-                                  </p:childTnLst>
-                                </p:cTn>
-                              </p:par>
-                            </p:childTnLst>
-                          </p:cTn>
-                        </p:par>
-                      </p:childTnLst>
-                    </p:cTn>
-                  </p:par>
-                  <p:par>
-                    <p:cTn id="23" fill="hold">
-                      <p:stCondLst>
-                        <p:cond delay="indefinite"/>
-                      </p:stCondLst>
-                      <p:childTnLst>
-                        <p:par>
-                          <p:cTn id="24" fill="hold">
-                            <p:stCondLst>
-                              <p:cond delay="0"/>
-                            </p:stCondLst>
-                            <p:childTnLst>
-                              <p:par>
-                                <p:cTn id="25" presetID="1" presetClass="entr" presetSubtype="0" fill="hold" grpId="0" nodeType="clickEffect">
-                                  <p:stCondLst>
-                                    <p:cond delay="0"/>
-                                  </p:stCondLst>
-                                  <p:childTnLst>
-                                    <p:set>
-                                      <p:cBhvr>
-                                        <p:cTn id="26" dur="1" fill="hold">
-                                          <p:stCondLst>
-                                            <p:cond delay="0"/>
-                                          </p:stCondLst>
-                                        </p:cTn>
-                                        <p:tgtEl>
-                                          <p:spTgt spid="3">
-                                            <p:txEl>
-                                              <p:pRg st="5" end="5"/>
-                                            </p:txEl>
-                                          </p:spTgt>
-                                        </p:tgtEl>
-                                        <p:attrNameLst>
-                                          <p:attrName>style.visibility</p:attrName>
-                                        </p:attrNameLst>
-                                      </p:cBhvr>
-                                      <p:to>
-                                        <p:strVal val="visible"/>
-                                      </p:to>
-                                    </p:set>
-                                  </p:childTnLst>
-                                </p:cTn>
-                              </p:par>
-                            </p:childTnLst>
-                          </p:cTn>
-                        </p:par>
-                      </p:childTnLst>
-                    </p:cTn>
-                  </p:par>
-                  <p:par>
-                    <p:cTn id="27" fill="hold">
-                      <p:stCondLst>
-                        <p:cond delay="indefinite"/>
-                      </p:stCondLst>
-                      <p:childTnLst>
-                        <p:par>
-                          <p:cTn id="28" fill="hold">
-                            <p:stCondLst>
-                              <p:cond delay="0"/>
-                            </p:stCondLst>
-                            <p:childTnLst>
-                              <p:par>
-                                <p:cTn id="29" presetID="1" presetClass="entr" presetSubtype="0" fill="hold" grpId="0" nodeType="clickEffect">
-                                  <p:stCondLst>
-                                    <p:cond delay="0"/>
-                                  </p:stCondLst>
-                                  <p:childTnLst>
-                                    <p:set>
-                                      <p:cBhvr>
-                                        <p:cTn id="30" dur="1" fill="hold">
-                                          <p:stCondLst>
-                                            <p:cond delay="0"/>
-                                          </p:stCondLst>
-                                        </p:cTn>
-                                        <p:tgtEl>
-                                          <p:spTgt spid="3">
-                                            <p:txEl>
-                                              <p:pRg st="6" end="6"/>
-                                            </p:txEl>
-                                          </p:spTgt>
-                                        </p:tgtEl>
-                                        <p:attrNameLst>
-                                          <p:attrName>style.visibility</p:attrName>
-                                        </p:attrNameLst>
-                                      </p:cBhvr>
-                                      <p:to>
-                                        <p:strVal val="visible"/>
-                                      </p:to>
-                                    </p:set>
-                                  </p:childTnLst>
-                                </p:cTn>
-                              </p:par>
-                            </p:childTnLst>
-                          </p:cTn>
-                        </p:par>
-                      </p:childTnLst>
-                    </p:cTn>
-                  </p:par>
-                  <p:par>
-                    <p:cTn id="31" fill="hold">
-                      <p:stCondLst>
-                        <p:cond delay="indefinite"/>
-                      </p:stCondLst>
-                      <p:childTnLst>
-                        <p:par>
-                          <p:cTn id="32" fill="hold">
-                            <p:stCondLst>
-                              <p:cond delay="0"/>
-                            </p:stCondLst>
-                            <p:childTnLst>
-                              <p:par>
-                                <p:cTn id="33" presetID="1" presetClass="entr" presetSubtype="0" fill="hold" grpId="0" nodeType="clickEffect">
-                                  <p:stCondLst>
-                                    <p:cond delay="0"/>
-                                  </p:stCondLst>
-                                  <p:childTnLst>
-                                    <p:set>
-                                      <p:cBhvr>
-                                        <p:cTn id="34" dur="1" fill="hold">
-                                          <p:stCondLst>
-                                            <p:cond delay="0"/>
-                                          </p:stCondLst>
-                                        </p:cTn>
-                                        <p:tgtEl>
-                                          <p:spTgt spid="3">
-                                            <p:txEl>
-                                              <p:pRg st="7" end="7"/>
-                                            </p:txEl>
-                                          </p:spTgt>
-                                        </p:tgtEl>
-                                        <p:attrNameLst>
-                                          <p:attrName>style.visibility</p:attrName>
-                                        </p:attrNameLst>
-                                      </p:cBhvr>
-                                      <p:to>
-                                        <p:strVal val="visible"/>
-                                      </p:to>
-                                    </p:set>
-                                  </p:childTnLst>
-                                </p:cTn>
-                              </p:par>
-                            </p:childTnLst>
-                          </p:cTn>
-                        </p:par>
-                      </p:childTnLst>
-                    </p:cTn>
-                  </p:par>
-                  <p:par>
-                    <p:cTn id="35" fill="hold">
-                      <p:stCondLst>
-                        <p:cond delay="indefinite"/>
-                      </p:stCondLst>
-                      <p:childTnLst>
-                        <p:par>
-                          <p:cTn id="36" fill="hold">
-                            <p:stCondLst>
-                              <p:cond delay="0"/>
-                            </p:stCondLst>
-                            <p:childTnLst>
-                              <p:par>
-                                <p:cTn id="37" presetID="1" presetClass="entr" presetSubtype="0" fill="hold" grpId="0" nodeType="clickEffect">
-                                  <p:stCondLst>
-                                    <p:cond delay="0"/>
-                                  </p:stCondLst>
-                                  <p:childTnLst>
-                                    <p:set>
-                                      <p:cBhvr>
-                                        <p:cTn id="38" dur="1" fill="hold">
-                                          <p:stCondLst>
-                                            <p:cond delay="0"/>
-                                          </p:stCondLst>
-                                        </p:cTn>
-                                        <p:tgtEl>
-                                          <p:spTgt spid="3">
-                                            <p:txEl>
-                                              <p:pRg st="8" end="8"/>
-                                            </p:txEl>
-                                          </p:spTgt>
-                                        </p:tgtEl>
-                                        <p:attrNameLst>
-                                          <p:attrName>style.visibility</p:attrName>
-                                        </p:attrNameLst>
-                                      </p:cBhvr>
-                                      <p:to>
-                                        <p:strVal val="visible"/>
-                                      </p:to>
-                                    </p:set>
-                                  </p:childTnLst>
-                                </p:cTn>
-                              </p:par>
-                            </p:childTnLst>
-                          </p:cTn>
-                        </p:par>
-                      </p:childTnLst>
-                    </p:cTn>
-                  </p:par>
-                </p:childTnLst>
-              </p:cTn>
-              <p:prevCondLst>
-                <p:cond evt="onPrev" delay="0">
-                  <p:tgtEl>
-                    <p:sldTgt/>
-                  </p:tgtEl>
-                </p:cond>
-              </p:prevCondLst>
-              <p:nextCondLst>
-                <p:cond evt="onNext" delay="0">
-                  <p:tgtEl>
-                    <p:sldTgt/>
-                  </p:tgtEl>
-                </p:cond>
-              </p:nextCondLst>
-            </p:seq>
-          </p:childTnLst>
-        </p:cTn>
-      </p:par>
-    </p:tnLst>
-    <p:bldLst>
-      <p:bldP spid="3" grpId="0" build="p"/>
-    </p:bldLst>
-  </p:timing>
-</p:sld>
-</file>
-
 <file path=ppt/theme/theme1.xml><?xml version="1.0" encoding="utf-8"?>
 <a:theme xmlns:a="http://schemas.openxmlformats.org/drawingml/2006/main" name="BCS">
   <a:themeElements>
@@ -27202,6 +25361,21 @@
 </file>
 
 <file path=customXml/item1.xml><?xml version="1.0" encoding="utf-8"?>
+<?mso-contentType ?>
+<FormTemplates xmlns="http://schemas.microsoft.com/sharepoint/v3/contenttype/forms">
+  <Display>DocumentLibraryForm</Display>
+  <Edit>DocumentLibraryForm</Edit>
+  <New>DocumentLibraryForm</New>
+</FormTemplates>
+</file>
+
+<file path=customXml/item2.xml><?xml version="1.0" encoding="utf-8"?>
+<p:properties xmlns:p="http://schemas.microsoft.com/office/2006/metadata/properties" xmlns:xsi="http://www.w3.org/2001/XMLSchema-instance" xmlns:pc="http://schemas.microsoft.com/office/infopath/2007/PartnerControls">
+  <documentManagement/>
+</p:properties>
+</file>
+
+<file path=customXml/item3.xml><?xml version="1.0" encoding="utf-8"?>
 <ct:contentTypeSchema xmlns:ct="http://schemas.microsoft.com/office/2006/metadata/contentType" xmlns:ma="http://schemas.microsoft.com/office/2006/metadata/properties/metaAttributes" ct:_="" ma:_="" ma:contentTypeName="Document" ma:contentTypeID="0x010100C4D27B8FA8976546BCD79313C588588D" ma:contentTypeVersion="8" ma:contentTypeDescription="Create a new document." ma:contentTypeScope="" ma:versionID="a112c56f6fe148a79025c76584832af0">
   <xsd:schema xmlns:xsd="http://www.w3.org/2001/XMLSchema" xmlns:xs="http://www.w3.org/2001/XMLSchema" xmlns:p="http://schemas.microsoft.com/office/2006/metadata/properties" xmlns:ns2="a1a2d923-8fea-42f1-bd41-9cdfff65694e" targetNamespace="http://schemas.microsoft.com/office/2006/metadata/properties" ma:root="true" ma:fieldsID="97c8655d467eaa9470a714421e7268c0" ns2:_="">
     <xsd:import namespace="a1a2d923-8fea-42f1-bd41-9cdfff65694e"/>
@@ -27369,22 +25543,24 @@
 </ct:contentTypeSchema>
 </file>
 
-<file path=customXml/item2.xml><?xml version="1.0" encoding="utf-8"?>
-<p:properties xmlns:p="http://schemas.microsoft.com/office/2006/metadata/properties" xmlns:xsi="http://www.w3.org/2001/XMLSchema-instance" xmlns:pc="http://schemas.microsoft.com/office/infopath/2007/PartnerControls">
-  <documentManagement/>
-</p:properties>
+<file path=customXml/itemProps1.xml><?xml version="1.0" encoding="utf-8"?>
+<ds:datastoreItem xmlns:ds="http://schemas.openxmlformats.org/officeDocument/2006/customXml" ds:itemID="{9DC439CA-6F1C-4005-ACA6-A52E04DEE0A7}">
+  <ds:schemaRefs>
+    <ds:schemaRef ds:uri="http://schemas.microsoft.com/sharepoint/v3/contenttype/forms"/>
+  </ds:schemaRefs>
+</ds:datastoreItem>
 </file>
 
-<file path=customXml/item3.xml><?xml version="1.0" encoding="utf-8"?>
-<?mso-contentType ?>
-<FormTemplates xmlns="http://schemas.microsoft.com/sharepoint/v3/contenttype/forms">
-  <Display>DocumentLibraryForm</Display>
-  <Edit>DocumentLibraryForm</Edit>
-  <New>DocumentLibraryForm</New>
-</FormTemplates>
+<file path=customXml/itemProps2.xml><?xml version="1.0" encoding="utf-8"?>
+<ds:datastoreItem xmlns:ds="http://schemas.openxmlformats.org/officeDocument/2006/customXml" ds:itemID="{5BDF4908-A52A-47DD-A794-6E02D71942FC}">
+  <ds:schemaRefs>
+    <ds:schemaRef ds:uri="http://schemas.microsoft.com/office/2006/metadata/properties"/>
+    <ds:schemaRef ds:uri="http://schemas.microsoft.com/office/infopath/2007/PartnerControls"/>
+  </ds:schemaRefs>
+</ds:datastoreItem>
 </file>
 
-<file path=customXml/itemProps1.xml><?xml version="1.0" encoding="utf-8"?>
+<file path=customXml/itemProps3.xml><?xml version="1.0" encoding="utf-8"?>
 <ds:datastoreItem xmlns:ds="http://schemas.openxmlformats.org/officeDocument/2006/customXml" ds:itemID="{9CF4F972-2392-44D0-AA45-41AC4FDC4A59}">
   <ds:schemaRefs>
     <ds:schemaRef ds:uri="a1a2d923-8fea-42f1-bd41-9cdfff65694e"/>
@@ -27402,23 +25578,6 @@
 </ds:datastoreItem>
 </file>
 
-<file path=customXml/itemProps2.xml><?xml version="1.0" encoding="utf-8"?>
-<ds:datastoreItem xmlns:ds="http://schemas.openxmlformats.org/officeDocument/2006/customXml" ds:itemID="{5BDF4908-A52A-47DD-A794-6E02D71942FC}">
-  <ds:schemaRefs>
-    <ds:schemaRef ds:uri="http://schemas.microsoft.com/office/2006/metadata/properties"/>
-    <ds:schemaRef ds:uri="http://schemas.microsoft.com/office/infopath/2007/PartnerControls"/>
-  </ds:schemaRefs>
-</ds:datastoreItem>
-</file>
-
-<file path=customXml/itemProps3.xml><?xml version="1.0" encoding="utf-8"?>
-<ds:datastoreItem xmlns:ds="http://schemas.openxmlformats.org/officeDocument/2006/customXml" ds:itemID="{9DC439CA-6F1C-4005-ACA6-A52E04DEE0A7}">
-  <ds:schemaRefs>
-    <ds:schemaRef ds:uri="http://schemas.microsoft.com/sharepoint/v3/contenttype/forms"/>
-  </ds:schemaRefs>
-</ds:datastoreItem>
-</file>
-
 <file path=docMetadata/LabelInfo.xml><?xml version="1.0" encoding="utf-8"?>
 <clbl:labelList xmlns:clbl="http://schemas.microsoft.com/office/2020/mipLabelMetadata">
   <clbl:label id="{4fc69ca6-ce6b-4059-8ad9-2049c3c135b3}" enabled="0" method="" siteId="{4fc69ca6-ce6b-4059-8ad9-2049c3c135b3}" removed="1"/>

--- a/Materjalid/Day16 Lõputööd/16-paev-andmetarkus-esitlus.pptx
+++ b/Materjalid/Day16 Lõputööd/16-paev-andmetarkus-esitlus.pptx
@@ -6,9 +6,7 @@
   </p:sldMasterIdLst>
   <p:sldIdLst>
     <p:sldId id="258" r:id="rId2"/>
-    <p:sldId id="259" r:id="rId3"/>
-    <p:sldId id="261" r:id="rId4"/>
-    <p:sldId id="257" r:id="rId5"/>
+    <p:sldId id="257" r:id="rId3"/>
   </p:sldIdLst>
   <p:sldSz cx="12192000" cy="6858000"/>
   <p:notesSz cx="6858000" cy="9144000"/>
@@ -107,6 +105,11 @@
       </a:defRPr>
     </a:lvl9pPr>
   </p:defaultTextStyle>
+  <p:extLst>
+    <p:ext uri="{EFAFB233-063F-42B5-8137-9DF3F51BA10A}">
+      <p15:sldGuideLst xmlns:p15="http://schemas.microsoft.com/office/powerpoint/2012/main"/>
+    </p:ext>
+  </p:extLst>
 </p:presentation>
 </file>
 
@@ -259,7 +262,7 @@
           <a:p>
             <a:fld id="{439BDB4B-7CD1-4763-9AD9-80E84D62B364}" type="datetimeFigureOut">
               <a:rPr lang="en-GB" smtClean="0"/>
-              <a:t>21/09/2026</a:t>
+              <a:t>02/10/2026</a:t>
             </a:fld>
             <a:endParaRPr lang="en-GB"/>
           </a:p>
@@ -459,7 +462,7 @@
           <a:p>
             <a:fld id="{439BDB4B-7CD1-4763-9AD9-80E84D62B364}" type="datetimeFigureOut">
               <a:rPr lang="en-GB" smtClean="0"/>
-              <a:t>21/09/2026</a:t>
+              <a:t>02/10/2026</a:t>
             </a:fld>
             <a:endParaRPr lang="en-GB"/>
           </a:p>
@@ -669,7 +672,7 @@
           <a:p>
             <a:fld id="{439BDB4B-7CD1-4763-9AD9-80E84D62B364}" type="datetimeFigureOut">
               <a:rPr lang="en-GB" smtClean="0"/>
-              <a:t>21/09/2026</a:t>
+              <a:t>02/10/2026</a:t>
             </a:fld>
             <a:endParaRPr lang="en-GB"/>
           </a:p>
@@ -869,7 +872,7 @@
           <a:p>
             <a:fld id="{439BDB4B-7CD1-4763-9AD9-80E84D62B364}" type="datetimeFigureOut">
               <a:rPr lang="en-GB" smtClean="0"/>
-              <a:t>21/09/2026</a:t>
+              <a:t>02/10/2026</a:t>
             </a:fld>
             <a:endParaRPr lang="en-GB"/>
           </a:p>
@@ -1145,7 +1148,7 @@
           <a:p>
             <a:fld id="{439BDB4B-7CD1-4763-9AD9-80E84D62B364}" type="datetimeFigureOut">
               <a:rPr lang="en-GB" smtClean="0"/>
-              <a:t>21/09/2026</a:t>
+              <a:t>02/10/2026</a:t>
             </a:fld>
             <a:endParaRPr lang="en-GB"/>
           </a:p>
@@ -1413,7 +1416,7 @@
           <a:p>
             <a:fld id="{439BDB4B-7CD1-4763-9AD9-80E84D62B364}" type="datetimeFigureOut">
               <a:rPr lang="en-GB" smtClean="0"/>
-              <a:t>21/09/2026</a:t>
+              <a:t>02/10/2026</a:t>
             </a:fld>
             <a:endParaRPr lang="en-GB"/>
           </a:p>
@@ -1828,7 +1831,7 @@
           <a:p>
             <a:fld id="{439BDB4B-7CD1-4763-9AD9-80E84D62B364}" type="datetimeFigureOut">
               <a:rPr lang="en-GB" smtClean="0"/>
-              <a:t>21/09/2026</a:t>
+              <a:t>02/10/2026</a:t>
             </a:fld>
             <a:endParaRPr lang="en-GB"/>
           </a:p>
@@ -1970,7 +1973,7 @@
           <a:p>
             <a:fld id="{439BDB4B-7CD1-4763-9AD9-80E84D62B364}" type="datetimeFigureOut">
               <a:rPr lang="en-GB" smtClean="0"/>
-              <a:t>21/09/2026</a:t>
+              <a:t>02/10/2026</a:t>
             </a:fld>
             <a:endParaRPr lang="en-GB"/>
           </a:p>
@@ -2083,7 +2086,7 @@
           <a:p>
             <a:fld id="{439BDB4B-7CD1-4763-9AD9-80E84D62B364}" type="datetimeFigureOut">
               <a:rPr lang="en-GB" smtClean="0"/>
-              <a:t>21/09/2026</a:t>
+              <a:t>02/10/2026</a:t>
             </a:fld>
             <a:endParaRPr lang="en-GB"/>
           </a:p>
@@ -2396,7 +2399,7 @@
           <a:p>
             <a:fld id="{439BDB4B-7CD1-4763-9AD9-80E84D62B364}" type="datetimeFigureOut">
               <a:rPr lang="en-GB" smtClean="0"/>
-              <a:t>21/09/2026</a:t>
+              <a:t>02/10/2026</a:t>
             </a:fld>
             <a:endParaRPr lang="en-GB"/>
           </a:p>
@@ -2685,7 +2688,7 @@
           <a:p>
             <a:fld id="{439BDB4B-7CD1-4763-9AD9-80E84D62B364}" type="datetimeFigureOut">
               <a:rPr lang="en-GB" smtClean="0"/>
-              <a:t>21/09/2026</a:t>
+              <a:t>02/10/2026</a:t>
             </a:fld>
             <a:endParaRPr lang="en-GB"/>
           </a:p>
@@ -2928,7 +2931,7 @@
           <a:p>
             <a:fld id="{439BDB4B-7CD1-4763-9AD9-80E84D62B364}" type="datetimeFigureOut">
               <a:rPr lang="en-GB" smtClean="0"/>
-              <a:t>21/09/2026</a:t>
+              <a:t>02/10/2026</a:t>
             </a:fld>
             <a:endParaRPr lang="en-GB"/>
           </a:p>
@@ -3811,617 +3814,6 @@
 </file>
 
 <file path=ppt/slides/slide2.xml><?xml version="1.0" encoding="utf-8"?>
-<p:sld xmlns:a="http://schemas.openxmlformats.org/drawingml/2006/main" xmlns:r="http://schemas.openxmlformats.org/officeDocument/2006/relationships" xmlns:p="http://schemas.openxmlformats.org/presentationml/2006/main">
-  <p:cSld>
-    <p:spTree>
-      <p:nvGrpSpPr>
-        <p:cNvPr id="1" name=""/>
-        <p:cNvGrpSpPr/>
-        <p:nvPr/>
-      </p:nvGrpSpPr>
-      <p:grpSpPr>
-        <a:xfrm>
-          <a:off x="0" y="0"/>
-          <a:ext cx="0" cy="0"/>
-          <a:chOff x="0" y="0"/>
-          <a:chExt cx="0" cy="0"/>
-        </a:xfrm>
-      </p:grpSpPr>
-      <p:sp>
-        <p:nvSpPr>
-          <p:cNvPr id="2" name="Title 1">
-            <a:extLst>
-              <a:ext uri="{FF2B5EF4-FFF2-40B4-BE49-F238E27FC236}">
-                <a16:creationId xmlns:a16="http://schemas.microsoft.com/office/drawing/2014/main" id="{22B73574-AD04-2F18-C772-FB805020B0A9}"/>
-              </a:ext>
-            </a:extLst>
-          </p:cNvPr>
-          <p:cNvSpPr>
-            <a:spLocks noGrp="1"/>
-          </p:cNvSpPr>
-          <p:nvPr>
-            <p:ph type="title"/>
-          </p:nvPr>
-        </p:nvSpPr>
-        <p:spPr/>
-        <p:txBody>
-          <a:bodyPr/>
-          <a:lstStyle/>
-          <a:p>
-            <a:r>
-              <a:rPr lang="en-GB" dirty="0"/>
-              <a:t>Power BI project fail</a:t>
-            </a:r>
-          </a:p>
-        </p:txBody>
-      </p:sp>
-      <p:sp>
-        <p:nvSpPr>
-          <p:cNvPr id="3" name="Content Placeholder 2">
-            <a:extLst>
-              <a:ext uri="{FF2B5EF4-FFF2-40B4-BE49-F238E27FC236}">
-                <a16:creationId xmlns:a16="http://schemas.microsoft.com/office/drawing/2014/main" id="{85E28F97-14E6-4BD4-C9AF-D784143D669C}"/>
-              </a:ext>
-            </a:extLst>
-          </p:cNvPr>
-          <p:cNvSpPr>
-            <a:spLocks noGrp="1"/>
-          </p:cNvSpPr>
-          <p:nvPr>
-            <p:ph idx="1"/>
-          </p:nvPr>
-        </p:nvSpPr>
-        <p:spPr/>
-        <p:txBody>
-          <a:bodyPr/>
-          <a:lstStyle/>
-          <a:p>
-            <a:r>
-              <a:rPr lang="en-GB" dirty="0" err="1"/>
-              <a:t>Tavaline</a:t>
-            </a:r>
-            <a:r>
-              <a:rPr lang="en-GB" dirty="0"/>
-              <a:t> power bi format </a:t>
-            </a:r>
-          </a:p>
-          <a:p>
-            <a:r>
-              <a:rPr lang="en-GB" dirty="0"/>
-              <a:t>Save as Power BI project</a:t>
-            </a:r>
-          </a:p>
-          <a:p>
-            <a:endParaRPr lang="en-GB" dirty="0"/>
-          </a:p>
-          <a:p>
-            <a:endParaRPr lang="en-GB" dirty="0"/>
-          </a:p>
-          <a:p>
-            <a:endParaRPr lang="en-GB" dirty="0"/>
-          </a:p>
-          <a:p>
-            <a:endParaRPr lang="en-GB" dirty="0"/>
-          </a:p>
-          <a:p>
-            <a:r>
-              <a:rPr lang="en-GB" dirty="0" err="1"/>
-              <a:t>Aruande</a:t>
-            </a:r>
-            <a:r>
-              <a:rPr lang="en-GB" dirty="0"/>
-              <a:t> </a:t>
-            </a:r>
-            <a:r>
-              <a:rPr lang="en-GB" dirty="0" err="1"/>
-              <a:t>osad</a:t>
-            </a:r>
-            <a:r>
-              <a:rPr lang="en-GB" dirty="0"/>
-              <a:t> </a:t>
-            </a:r>
-            <a:r>
-              <a:rPr lang="en-GB" dirty="0" err="1"/>
-              <a:t>eraldi</a:t>
-            </a:r>
-            <a:r>
-              <a:rPr lang="en-GB" dirty="0"/>
-              <a:t> </a:t>
-            </a:r>
-            <a:r>
-              <a:rPr lang="en-GB" dirty="0" err="1"/>
-              <a:t>failidena</a:t>
-            </a:r>
-            <a:endParaRPr lang="en-GB" dirty="0"/>
-          </a:p>
-          <a:p>
-            <a:endParaRPr lang="en-GB" dirty="0"/>
-          </a:p>
-          <a:p>
-            <a:endParaRPr lang="en-GB" dirty="0"/>
-          </a:p>
-        </p:txBody>
-      </p:sp>
-      <p:pic>
-        <p:nvPicPr>
-          <p:cNvPr id="7" name="Picture 6">
-            <a:extLst>
-              <a:ext uri="{FF2B5EF4-FFF2-40B4-BE49-F238E27FC236}">
-                <a16:creationId xmlns:a16="http://schemas.microsoft.com/office/drawing/2014/main" id="{DD58AD75-8DFD-FB5F-A4CE-58B1246131B7}"/>
-              </a:ext>
-            </a:extLst>
-          </p:cNvPr>
-          <p:cNvPicPr>
-            <a:picLocks noChangeAspect="1"/>
-          </p:cNvPicPr>
-          <p:nvPr/>
-        </p:nvPicPr>
-        <p:blipFill>
-          <a:blip r:embed="rId2"/>
-          <a:stretch>
-            <a:fillRect/>
-          </a:stretch>
-        </p:blipFill>
-        <p:spPr>
-          <a:xfrm>
-            <a:off x="5228690" y="1615217"/>
-            <a:ext cx="2210108" cy="685896"/>
-          </a:xfrm>
-          <a:prstGeom prst="rect">
-            <a:avLst/>
-          </a:prstGeom>
-        </p:spPr>
-      </p:pic>
-      <p:pic>
-        <p:nvPicPr>
-          <p:cNvPr id="9" name="Picture 8">
-            <a:extLst>
-              <a:ext uri="{FF2B5EF4-FFF2-40B4-BE49-F238E27FC236}">
-                <a16:creationId xmlns:a16="http://schemas.microsoft.com/office/drawing/2014/main" id="{C696B611-C266-15D8-EDD8-091C604AFD57}"/>
-              </a:ext>
-            </a:extLst>
-          </p:cNvPr>
-          <p:cNvPicPr>
-            <a:picLocks noChangeAspect="1"/>
-          </p:cNvPicPr>
-          <p:nvPr/>
-        </p:nvPicPr>
-        <p:blipFill>
-          <a:blip r:embed="rId3"/>
-          <a:stretch>
-            <a:fillRect/>
-          </a:stretch>
-        </p:blipFill>
-        <p:spPr>
-          <a:xfrm>
-            <a:off x="5095321" y="2301113"/>
-            <a:ext cx="2476846" cy="1086002"/>
-          </a:xfrm>
-          <a:prstGeom prst="rect">
-            <a:avLst/>
-          </a:prstGeom>
-        </p:spPr>
-      </p:pic>
-      <p:pic>
-        <p:nvPicPr>
-          <p:cNvPr id="11" name="Picture 10">
-            <a:extLst>
-              <a:ext uri="{FF2B5EF4-FFF2-40B4-BE49-F238E27FC236}">
-                <a16:creationId xmlns:a16="http://schemas.microsoft.com/office/drawing/2014/main" id="{A1C720CD-1EB5-F7AB-06C7-22D6214C0022}"/>
-              </a:ext>
-            </a:extLst>
-          </p:cNvPr>
-          <p:cNvPicPr>
-            <a:picLocks noChangeAspect="1"/>
-          </p:cNvPicPr>
-          <p:nvPr/>
-        </p:nvPicPr>
-        <p:blipFill>
-          <a:blip r:embed="rId4"/>
-          <a:stretch>
-            <a:fillRect/>
-          </a:stretch>
-        </p:blipFill>
-        <p:spPr>
-          <a:xfrm>
-            <a:off x="5095321" y="3672972"/>
-            <a:ext cx="5229955" cy="828791"/>
-          </a:xfrm>
-          <a:prstGeom prst="rect">
-            <a:avLst/>
-          </a:prstGeom>
-        </p:spPr>
-      </p:pic>
-      <p:pic>
-        <p:nvPicPr>
-          <p:cNvPr id="13" name="Picture 12">
-            <a:extLst>
-              <a:ext uri="{FF2B5EF4-FFF2-40B4-BE49-F238E27FC236}">
-                <a16:creationId xmlns:a16="http://schemas.microsoft.com/office/drawing/2014/main" id="{F238D4D9-6A82-E2D8-F3D6-40027960E317}"/>
-              </a:ext>
-            </a:extLst>
-          </p:cNvPr>
-          <p:cNvPicPr>
-            <a:picLocks noChangeAspect="1"/>
-          </p:cNvPicPr>
-          <p:nvPr/>
-        </p:nvPicPr>
-        <p:blipFill>
-          <a:blip r:embed="rId5"/>
-          <a:stretch>
-            <a:fillRect/>
-          </a:stretch>
-        </p:blipFill>
-        <p:spPr>
-          <a:xfrm>
-            <a:off x="4892040" y="5394083"/>
-            <a:ext cx="6113317" cy="917817"/>
-          </a:xfrm>
-          <a:prstGeom prst="rect">
-            <a:avLst/>
-          </a:prstGeom>
-        </p:spPr>
-      </p:pic>
-    </p:spTree>
-    <p:extLst>
-      <p:ext uri="{BB962C8B-B14F-4D97-AF65-F5344CB8AC3E}">
-        <p14:creationId xmlns:p14="http://schemas.microsoft.com/office/powerpoint/2010/main" val="183521818"/>
-      </p:ext>
-    </p:extLst>
-  </p:cSld>
-  <p:clrMapOvr>
-    <a:masterClrMapping/>
-  </p:clrMapOvr>
-</p:sld>
-</file>
-
-<file path=ppt/slides/slide3.xml><?xml version="1.0" encoding="utf-8"?>
-<p:sld xmlns:a="http://schemas.openxmlformats.org/drawingml/2006/main" xmlns:r="http://schemas.openxmlformats.org/officeDocument/2006/relationships" xmlns:p="http://schemas.openxmlformats.org/presentationml/2006/main">
-  <p:cSld>
-    <p:spTree>
-      <p:nvGrpSpPr>
-        <p:cNvPr id="1" name=""/>
-        <p:cNvGrpSpPr/>
-        <p:nvPr/>
-      </p:nvGrpSpPr>
-      <p:grpSpPr>
-        <a:xfrm>
-          <a:off x="0" y="0"/>
-          <a:ext cx="0" cy="0"/>
-          <a:chOff x="0" y="0"/>
-          <a:chExt cx="0" cy="0"/>
-        </a:xfrm>
-      </p:grpSpPr>
-      <p:sp>
-        <p:nvSpPr>
-          <p:cNvPr id="2" name="Title 1">
-            <a:extLst>
-              <a:ext uri="{FF2B5EF4-FFF2-40B4-BE49-F238E27FC236}">
-                <a16:creationId xmlns:a16="http://schemas.microsoft.com/office/drawing/2014/main" id="{F5676542-8332-4C8F-5400-967DEC32C190}"/>
-              </a:ext>
-            </a:extLst>
-          </p:cNvPr>
-          <p:cNvSpPr>
-            <a:spLocks noGrp="1"/>
-          </p:cNvSpPr>
-          <p:nvPr>
-            <p:ph type="title"/>
-          </p:nvPr>
-        </p:nvSpPr>
-        <p:spPr/>
-        <p:txBody>
-          <a:bodyPr/>
-          <a:lstStyle/>
-          <a:p>
-            <a:r>
-              <a:rPr lang="en-GB" dirty="0" err="1"/>
-              <a:t>Muudatused</a:t>
-            </a:r>
-            <a:r>
-              <a:rPr lang="en-GB" dirty="0"/>
-              <a:t> </a:t>
-            </a:r>
-            <a:r>
-              <a:rPr lang="en-GB" dirty="0" err="1"/>
-              <a:t>github</a:t>
-            </a:r>
-            <a:r>
-              <a:rPr lang="en-GB" dirty="0"/>
-              <a:t> </a:t>
-            </a:r>
-            <a:r>
-              <a:rPr lang="en-GB" dirty="0" err="1"/>
-              <a:t>desktopis</a:t>
-            </a:r>
-            <a:endParaRPr lang="en-GB" dirty="0"/>
-          </a:p>
-        </p:txBody>
-      </p:sp>
-      <p:pic>
-        <p:nvPicPr>
-          <p:cNvPr id="5" name="Content Placeholder 4">
-            <a:extLst>
-              <a:ext uri="{FF2B5EF4-FFF2-40B4-BE49-F238E27FC236}">
-                <a16:creationId xmlns:a16="http://schemas.microsoft.com/office/drawing/2014/main" id="{94504286-3D9D-CEE5-6E99-4C7F22049314}"/>
-              </a:ext>
-            </a:extLst>
-          </p:cNvPr>
-          <p:cNvPicPr>
-            <a:picLocks noGrp="1" noChangeAspect="1"/>
-          </p:cNvPicPr>
-          <p:nvPr>
-            <p:ph idx="1"/>
-          </p:nvPr>
-        </p:nvPicPr>
-        <p:blipFill>
-          <a:blip r:embed="rId2"/>
-          <a:stretch>
-            <a:fillRect/>
-          </a:stretch>
-        </p:blipFill>
-        <p:spPr>
-          <a:xfrm>
-            <a:off x="5794767" y="1690688"/>
-            <a:ext cx="6161148" cy="4351338"/>
-          </a:xfrm>
-          <a:prstGeom prst="rect">
-            <a:avLst/>
-          </a:prstGeom>
-        </p:spPr>
-      </p:pic>
-      <p:sp>
-        <p:nvSpPr>
-          <p:cNvPr id="6" name="Content Placeholder 2">
-            <a:extLst>
-              <a:ext uri="{FF2B5EF4-FFF2-40B4-BE49-F238E27FC236}">
-                <a16:creationId xmlns:a16="http://schemas.microsoft.com/office/drawing/2014/main" id="{C03E490C-938B-B4BE-640F-BC21F79C0AA0}"/>
-              </a:ext>
-            </a:extLst>
-          </p:cNvPr>
-          <p:cNvSpPr txBox="1">
-            <a:spLocks/>
-          </p:cNvSpPr>
-          <p:nvPr/>
-        </p:nvSpPr>
-        <p:spPr>
-          <a:xfrm>
-            <a:off x="838200" y="1825625"/>
-            <a:ext cx="10515600" cy="4351338"/>
-          </a:xfrm>
-          <a:prstGeom prst="rect">
-            <a:avLst/>
-          </a:prstGeom>
-        </p:spPr>
-        <p:txBody>
-          <a:bodyPr vert="horz" lIns="91440" tIns="45720" rIns="91440" bIns="45720" rtlCol="0">
-            <a:normAutofit/>
-          </a:bodyPr>
-          <a:lstStyle>
-            <a:lvl1pPr marL="228600" indent="-228600" algn="l" defTabSz="914400" rtl="0" eaLnBrk="1" latinLnBrk="0" hangingPunct="1">
-              <a:lnSpc>
-                <a:spcPct val="90000"/>
-              </a:lnSpc>
-              <a:spcBef>
-                <a:spcPts val="1000"/>
-              </a:spcBef>
-              <a:buFont typeface="Arial" panose="020B0604020202020204" pitchFamily="34" charset="0"/>
-              <a:buChar char="•"/>
-              <a:defRPr sz="2800" kern="1200">
-                <a:solidFill>
-                  <a:schemeClr val="tx1"/>
-                </a:solidFill>
-                <a:latin typeface="+mn-lt"/>
-                <a:ea typeface="+mn-ea"/>
-                <a:cs typeface="+mn-cs"/>
-              </a:defRPr>
-            </a:lvl1pPr>
-            <a:lvl2pPr marL="685800" indent="-228600" algn="l" defTabSz="914400" rtl="0" eaLnBrk="1" latinLnBrk="0" hangingPunct="1">
-              <a:lnSpc>
-                <a:spcPct val="90000"/>
-              </a:lnSpc>
-              <a:spcBef>
-                <a:spcPts val="500"/>
-              </a:spcBef>
-              <a:buFont typeface="Arial" panose="020B0604020202020204" pitchFamily="34" charset="0"/>
-              <a:buChar char="•"/>
-              <a:defRPr sz="2400" kern="1200">
-                <a:solidFill>
-                  <a:schemeClr val="tx1"/>
-                </a:solidFill>
-                <a:latin typeface="+mn-lt"/>
-                <a:ea typeface="+mn-ea"/>
-                <a:cs typeface="+mn-cs"/>
-              </a:defRPr>
-            </a:lvl2pPr>
-            <a:lvl3pPr marL="1143000" indent="-228600" algn="l" defTabSz="914400" rtl="0" eaLnBrk="1" latinLnBrk="0" hangingPunct="1">
-              <a:lnSpc>
-                <a:spcPct val="90000"/>
-              </a:lnSpc>
-              <a:spcBef>
-                <a:spcPts val="500"/>
-              </a:spcBef>
-              <a:buFont typeface="Arial" panose="020B0604020202020204" pitchFamily="34" charset="0"/>
-              <a:buChar char="•"/>
-              <a:defRPr sz="2000" kern="1200">
-                <a:solidFill>
-                  <a:schemeClr val="tx1"/>
-                </a:solidFill>
-                <a:latin typeface="+mn-lt"/>
-                <a:ea typeface="+mn-ea"/>
-                <a:cs typeface="+mn-cs"/>
-              </a:defRPr>
-            </a:lvl3pPr>
-            <a:lvl4pPr marL="1600200" indent="-228600" algn="l" defTabSz="914400" rtl="0" eaLnBrk="1" latinLnBrk="0" hangingPunct="1">
-              <a:lnSpc>
-                <a:spcPct val="90000"/>
-              </a:lnSpc>
-              <a:spcBef>
-                <a:spcPts val="500"/>
-              </a:spcBef>
-              <a:buFont typeface="Arial" panose="020B0604020202020204" pitchFamily="34" charset="0"/>
-              <a:buChar char="•"/>
-              <a:defRPr sz="1800" kern="1200">
-                <a:solidFill>
-                  <a:schemeClr val="tx1"/>
-                </a:solidFill>
-                <a:latin typeface="+mn-lt"/>
-                <a:ea typeface="+mn-ea"/>
-                <a:cs typeface="+mn-cs"/>
-              </a:defRPr>
-            </a:lvl4pPr>
-            <a:lvl5pPr marL="2057400" indent="-228600" algn="l" defTabSz="914400" rtl="0" eaLnBrk="1" latinLnBrk="0" hangingPunct="1">
-              <a:lnSpc>
-                <a:spcPct val="90000"/>
-              </a:lnSpc>
-              <a:spcBef>
-                <a:spcPts val="500"/>
-              </a:spcBef>
-              <a:buFont typeface="Arial" panose="020B0604020202020204" pitchFamily="34" charset="0"/>
-              <a:buChar char="•"/>
-              <a:defRPr sz="1800" kern="1200">
-                <a:solidFill>
-                  <a:schemeClr val="tx1"/>
-                </a:solidFill>
-                <a:latin typeface="+mn-lt"/>
-                <a:ea typeface="+mn-ea"/>
-                <a:cs typeface="+mn-cs"/>
-              </a:defRPr>
-            </a:lvl5pPr>
-            <a:lvl6pPr marL="2514600" indent="-228600" algn="l" defTabSz="914400" rtl="0" eaLnBrk="1" latinLnBrk="0" hangingPunct="1">
-              <a:lnSpc>
-                <a:spcPct val="90000"/>
-              </a:lnSpc>
-              <a:spcBef>
-                <a:spcPts val="500"/>
-              </a:spcBef>
-              <a:buFont typeface="Arial" panose="020B0604020202020204" pitchFamily="34" charset="0"/>
-              <a:buChar char="•"/>
-              <a:defRPr sz="1800" kern="1200">
-                <a:solidFill>
-                  <a:schemeClr val="tx1"/>
-                </a:solidFill>
-                <a:latin typeface="+mn-lt"/>
-                <a:ea typeface="+mn-ea"/>
-                <a:cs typeface="+mn-cs"/>
-              </a:defRPr>
-            </a:lvl6pPr>
-            <a:lvl7pPr marL="2971800" indent="-228600" algn="l" defTabSz="914400" rtl="0" eaLnBrk="1" latinLnBrk="0" hangingPunct="1">
-              <a:lnSpc>
-                <a:spcPct val="90000"/>
-              </a:lnSpc>
-              <a:spcBef>
-                <a:spcPts val="500"/>
-              </a:spcBef>
-              <a:buFont typeface="Arial" panose="020B0604020202020204" pitchFamily="34" charset="0"/>
-              <a:buChar char="•"/>
-              <a:defRPr sz="1800" kern="1200">
-                <a:solidFill>
-                  <a:schemeClr val="tx1"/>
-                </a:solidFill>
-                <a:latin typeface="+mn-lt"/>
-                <a:ea typeface="+mn-ea"/>
-                <a:cs typeface="+mn-cs"/>
-              </a:defRPr>
-            </a:lvl7pPr>
-            <a:lvl8pPr marL="3429000" indent="-228600" algn="l" defTabSz="914400" rtl="0" eaLnBrk="1" latinLnBrk="0" hangingPunct="1">
-              <a:lnSpc>
-                <a:spcPct val="90000"/>
-              </a:lnSpc>
-              <a:spcBef>
-                <a:spcPts val="500"/>
-              </a:spcBef>
-              <a:buFont typeface="Arial" panose="020B0604020202020204" pitchFamily="34" charset="0"/>
-              <a:buChar char="•"/>
-              <a:defRPr sz="1800" kern="1200">
-                <a:solidFill>
-                  <a:schemeClr val="tx1"/>
-                </a:solidFill>
-                <a:latin typeface="+mn-lt"/>
-                <a:ea typeface="+mn-ea"/>
-                <a:cs typeface="+mn-cs"/>
-              </a:defRPr>
-            </a:lvl8pPr>
-            <a:lvl9pPr marL="3886200" indent="-228600" algn="l" defTabSz="914400" rtl="0" eaLnBrk="1" latinLnBrk="0" hangingPunct="1">
-              <a:lnSpc>
-                <a:spcPct val="90000"/>
-              </a:lnSpc>
-              <a:spcBef>
-                <a:spcPts val="500"/>
-              </a:spcBef>
-              <a:buFont typeface="Arial" panose="020B0604020202020204" pitchFamily="34" charset="0"/>
-              <a:buChar char="•"/>
-              <a:defRPr sz="1800" kern="1200">
-                <a:solidFill>
-                  <a:schemeClr val="tx1"/>
-                </a:solidFill>
-                <a:latin typeface="+mn-lt"/>
-                <a:ea typeface="+mn-ea"/>
-                <a:cs typeface="+mn-cs"/>
-              </a:defRPr>
-            </a:lvl9pPr>
-          </a:lstStyle>
-          <a:p>
-            <a:r>
-              <a:rPr lang="en-GB" dirty="0" err="1"/>
-              <a:t>Muutsin</a:t>
-            </a:r>
-            <a:r>
-              <a:rPr lang="en-GB" dirty="0"/>
-              <a:t> </a:t>
-            </a:r>
-            <a:r>
-              <a:rPr lang="en-GB" dirty="0" err="1"/>
-              <a:t>graafiku</a:t>
-            </a:r>
-            <a:r>
-              <a:rPr lang="en-GB" dirty="0"/>
-              <a:t> </a:t>
-            </a:r>
-            <a:r>
-              <a:rPr lang="en-GB" dirty="0" err="1"/>
-              <a:t>asukohta</a:t>
-            </a:r>
-            <a:endParaRPr lang="en-GB" dirty="0"/>
-          </a:p>
-          <a:p>
-            <a:r>
-              <a:rPr lang="en-GB" dirty="0" err="1"/>
-              <a:t>Muutsin</a:t>
-            </a:r>
-            <a:r>
-              <a:rPr lang="en-GB" dirty="0"/>
-              <a:t> </a:t>
-            </a:r>
-            <a:r>
-              <a:rPr lang="en-GB" dirty="0" err="1"/>
-              <a:t>tabelist</a:t>
-            </a:r>
-            <a:r>
-              <a:rPr lang="en-GB" dirty="0"/>
-              <a:t> </a:t>
-            </a:r>
-            <a:r>
-              <a:rPr lang="en-GB" dirty="0" err="1"/>
-              <a:t>graafikuks</a:t>
-            </a:r>
-            <a:endParaRPr lang="en-GB" dirty="0"/>
-          </a:p>
-        </p:txBody>
-      </p:sp>
-    </p:spTree>
-    <p:extLst>
-      <p:ext uri="{BB962C8B-B14F-4D97-AF65-F5344CB8AC3E}">
-        <p14:creationId xmlns:p14="http://schemas.microsoft.com/office/powerpoint/2010/main" val="1978862877"/>
-      </p:ext>
-    </p:extLst>
-  </p:cSld>
-  <p:clrMapOvr>
-    <a:masterClrMapping/>
-  </p:clrMapOvr>
-</p:sld>
-</file>
-
-<file path=ppt/slides/slide4.xml><?xml version="1.0" encoding="utf-8"?>
 <p:sld xmlns:a="http://schemas.openxmlformats.org/drawingml/2006/main" xmlns:r="http://schemas.openxmlformats.org/officeDocument/2006/relationships" xmlns:p="http://schemas.openxmlformats.org/presentationml/2006/main">
   <p:cSld>
     <p:spTree>
